--- a/docs/links-26/presentations/In-Step-for-colleagues.pptx
+++ b/docs/links-26/presentations/In-Step-for-colleagues.pptx
@@ -1484,7 +1484,7 @@
           <a:p>
             <a:r>
               <a:rPr lang="en-US" dirty="0"/>
-              <a:t>Lead with the closers: they are the shifts people dislike most, and every one of them is shorter. Weekday 15:45 to 23:55 instead of 15:15 (8h 10m, not 8h 40m); Saturday 15:45 too, instead of 14:45 (8h 10m, not 9h 10m); Sunday 15:15 to 23:25 instead of 14:30 (8h 10m, not 8h 55m). Some earlies go the other way: two new weekday earlies, 06:20–15:15 and 07:00–15:45, are 8h 55m and 8h 45m, where no early today is longer than 8h 30m. Be upfront about the two minutes on the average: the 26-week link may have no more than 219 contracted days a year, so the same 35 hours go into slightly fewer, slightly longer shifts. Nothing runs over 9 hours.</a:t>
+              <a:t>Lead with the closers: they are the shifts people dislike most, and every one of them is shorter. Weekday 15:45 to 23:55 instead of 15:15 (8h 10m, not 8h 40m); Saturday 15:45 too, instead of 14:45 (8h 10m, not 9h 10m); Sunday 15:15 to 23:25 instead of 14:30 (8h 10m, not 8h 55m). Some earlies go the other way: two new weekday earlies, 06:20–15:15 and 07:00–15:45, are 8h 55m and 8h 45m — about 40 a year each — where no early today is longer than 8h 30m. Be upfront about the two minutes on the average: the 26-week link may have no more than 219 contracted days a year, so the same 35 hours go into slightly fewer, slightly longer shifts. Nothing runs over 9 hours.</a:t>
             </a:r>
             <a:endParaRPr lang="en-US" dirty="0"/>
           </a:p>
@@ -4473,7 +4473,7 @@
                 <a:ea typeface="Inter" pitchFamily="34" charset="-122"/>
                 <a:cs typeface="Inter" pitchFamily="34" charset="-120"/>
               </a:rPr>
-              <a:t>Several of them are shorter versions of the lates you already work today.</a:t>
+              <a:t>Three are shorter versions of today’s lates; two are longer weekday earlies.</a:t>
             </a:r>
             <a:endParaRPr lang="en-US" sz="1250" dirty="0"/>
           </a:p>
@@ -8353,7 +8353,7 @@
                 <a:ea typeface="Inter" pitchFamily="34" charset="-122"/>
                 <a:cs typeface="Inter" pitchFamily="34" charset="-120"/>
               </a:rPr>
-              <a:t>Saturdays: 1 hour</a:t>
+              <a:t>up to 1 hour</a:t>
             </a:r>
             <a:endParaRPr lang="en-US" sz="1200" dirty="0"/>
           </a:p>
@@ -13224,7 +13224,7 @@
                 <a:ea typeface="Inter" pitchFamily="34" charset="-122"/>
                 <a:cs typeface="Inter" pitchFamily="34" charset="-120"/>
               </a:rPr>
-              <a:t>15:45–23:55 — the closer, 1 hour later than 14:45</a:t>
+              <a:t>15:45–23:55 — the weekday closer, 1 hour later than 14:45</a:t>
             </a:r>
             <a:endParaRPr lang="en-US" sz="1050" dirty="0"/>
           </a:p>
@@ -13313,7 +13313,7 @@
                 <a:ea typeface="Inter" pitchFamily="34" charset="-122"/>
                 <a:cs typeface="Inter" pitchFamily="34" charset="-120"/>
               </a:rPr>
-              <a:t>14:30–22:30 — the ticket-office late</a:t>
+              <a:t>14:30–22:30 — the ticket-office late (also a weekday time)</a:t>
             </a:r>
             <a:endParaRPr lang="en-US" sz="1050" dirty="0"/>
           </a:p>

--- a/docs/links-26/presentations/In-Step-for-colleagues.pptx
+++ b/docs/links-26/presentations/In-Step-for-colleagues.pptx
@@ -692,7 +692,7 @@
           <a:p>
             <a:r>
               <a:rPr lang="en-US" dirty="0"/>
-              <a:t>Leave is only needed on working days Monday to Saturday; rest days and Sundays cost nothing. Today there is one unusual stretch of the roster where 14 days buys 30 days off — In Step spreads rest days more evenly, so its best is 28. On average it is the same, 23.4 days, and at its worst it is a day better than today. Four full weeks off (Sunday to Saturday) takes at least 15 days of leave, instead of 14 at best today. Say the four-weeks figure plainly: In Step and all four shortlisted links are worse than today here (Long Break, the leave-first design in the pack, keeps the 14), and people plan a year around it. The averages depend on where you count a booking as starting, so quote those as “about the same”.</a:t>
+              <a:t>Leave is only needed on working days Monday to Saturday; rest days and Sundays cost nothing. Today there is one unusual stretch of the roster where 14 days buys 30 days off — In Step spreads rest days more evenly, so its best is 28. On average it is the same, 23.4 days, and at its worst it is a day better than today. Four full weeks off (Sunday to Saturday) takes at least 15 days of leave, instead of 14 at best today. Say the four-weeks figure plainly: both shortlisted links are worse than today here (Long Break, the leave-first design in the pack, keeps the 14), and people plan a year around it. The averages depend on where you count a booking as starting, so quote those as “about the same”.</a:t>
             </a:r>
             <a:endParaRPr lang="en-US" dirty="0"/>
           </a:p>

--- a/docs/links-26/presentations/In-Step-for-colleagues.pptx
+++ b/docs/links-26/presentations/In-Step-for-colleagues.pptx
@@ -1132,7 +1132,7 @@
           <a:p>
             <a:r>
               <a:rPr lang="en-US" dirty="0"/>
-              <a:t>This is the whole pitch on one slide. Same 35-hour week as now. Never more than five days in a row on the fixed rota — six at most when a cover week falls badly, where today it is seven and can reach nine. Seven full weekends off in every 26 weeks, against four in 20 today, and never more than five weeks apart — though each person works about two more Saturdays a year. Every week is all earlies or all lates, and 18 of the 21 working weeks keep one shift time Monday to Friday. Nine of the fifteen shift times are ones people already work, today’s 13:45 finish among them. And every closing shift is shorter: the weekday closer by 30 minutes, the Saturday closer by an hour and the Sunday closer by 45 minutes. Say the leave cost here too, before anyone asks: four full weeks off, Sunday to Saturday, takes 15 days’ leave rather than 14, and the best 14-day stretch is 28 days off rather than 30; the average is the same and the worst a day better. A cover week is one of the five weeks in 26 with no fixed shifts: its four duties are placed later to cover leave and sickness; the fixed rota is the other 21 weeks, whose shifts are set.</a:t>
+              <a:t>This is the whole pitch on one slide. Same 35-hour week as now. Never more than five days in a row on the fixed rota — six at most when a cover week falls badly, where today it is seven and can reach nine. Seven full weekends off in every 26 weeks, against four in 20 today, and never more than five weeks apart — though each person works about two more Saturdays a year. Every working week is all earlies or all lates, and 18 of the 21 working weeks keep one shift time Monday to Friday. Nine of the fifteen shift times are ones people already work, today’s 13:45 finish among them. And every closing shift is shorter: the weekday closer by 30 minutes, the Saturday closer by an hour and the Sunday closer by 45 minutes. Say the leave cost here too, before anyone asks: four full weeks off, Sunday to Saturday, takes 15 days’ leave rather than 14, and the best 14-day stretch is 28 days off rather than 30; the average is the same and the worst a day better. A cover week is one of the five weeks in 26 with no fixed shifts: its four duties are placed later to cover leave and sickness; the fixed rota is the other 21 weeks, whose shifts are set.</a:t>
             </a:r>
             <a:endParaRPr lang="en-US" dirty="0"/>
           </a:p>
@@ -1220,7 +1220,7 @@
           <a:p>
             <a:r>
               <a:rPr lang="en-US" dirty="0"/>
-              <a:t>The change is coming whatever we do: the December 2026 timetable and the new staffing levels mean the link has to be redrawn. The question is which version we want. The staffing levels and the Sunday cover were confirmed verbally on 29 September 2026, and the 26-person link, its five cover weeks and a ceiling of 219 contracted days a year on 1 October 2026: nine rules the proposal is scored on. Fourteen on a Saturday is one of three flexible aims, worked towards but not scored.</a:t>
+              <a:t>The change is coming whatever we do: the December 2026 timetable and the new staffing levels mean the link has to be redrawn. The question is which version we want. The staffing levels and the Sunday cover were confirmed verbally on 29 September 2026; with the ticket office’s pairs and the cap on shift times they are the nine December rules every proposal is scored on. The 26-week link, its five cover weeks and the ceiling of 219 contracted days a year were set on 1 October 2026. Fourteen on a Saturday is one of three flexible aims, worked towards but not scored.</a:t>
             </a:r>
             <a:endParaRPr lang="en-US" dirty="0"/>
           </a:p>
@@ -1308,7 +1308,7 @@
           <a:p>
             <a:r>
               <a:rPr lang="en-US" dirty="0"/>
-              <a:t>Monday to Saturday, counting a cover week as four days worked, the same way the clerks do. Sundays are overtime by agreement, so they are not in these figures, today’s or In Step’s. Exactly, In Step works out at 218.6 days a year: just under today’s 219, which is also the most the 26-week link is allowed (agreed 1 October 2026). The average shift is about two minutes longer, which is on slide 6.</a:t>
+              <a:t>Monday to Saturday, counting a cover week as four days worked, the same way the clerks do. Sundays are overtime by agreement, so they are not in these figures, today’s or In Step’s. Exactly, In Step works out at 218.6 days a year: just under today’s 219, which is also the most the 26-week link is allowed (set on 1 October 2026; a year here is 365 days, as the ceiling’s is). The average shift is about two minutes longer, which is on slide 6.</a:t>
             </a:r>
             <a:endParaRPr lang="en-US" dirty="0"/>
           </a:p>
@@ -1396,7 +1396,7 @@
           <a:p>
             <a:r>
               <a:rPr lang="en-US" dirty="0"/>
-              <a:t>Basic pay follows the 35-hour week, which does not change; overtime and premium duties vary person to person. The Saturday and Sunday counts are the link’s fixed duties and leave out anything later given in a cover week. Saturdays in the contract are paid at time and a quarter, and on average a person is rostered about 28 a year instead of 26. Sundays stay overtime: 10 a week shared among 26 people instead of 8 among 20, so about the same each (20 a year, against 21). These are averages across the whole link — your own depends on which line you start on — and they are not a payslip; the Pay Calculator in the app does that. The yearly figures are averages from the fixed rota; a cover week’s duties are not known yet and are left out.</a:t>
+              <a:t>Basic pay follows the 35-hour week, which does not change; overtime and premium duties vary person to person. The Saturday and Sunday counts are the link’s fixed duties and leave out anything later given in a cover week. Saturdays in the contract are paid at time and a quarter, and on average a person is rostered about 28 a year instead of 26. Sundays stay overtime: 10 a week shared among 26 people instead of 8 among 20, so about the same each (20 a year, against 21). On this link they are everyone’s figures, whichever line you start on: a year is exactly two turns of the 26 weeks, so everyone works each week twice — today’s, on 20 weeks, are averages. They are not a payslip; the Pay Calculator in the app does that.</a:t>
             </a:r>
             <a:endParaRPr lang="en-US" dirty="0"/>
           </a:p>
@@ -1484,7 +1484,7 @@
           <a:p>
             <a:r>
               <a:rPr lang="en-US" dirty="0"/>
-              <a:t>Lead with the closers: they are the shifts people dislike most, and every one of them is shorter. Weekday 15:45 to 23:55 instead of 15:15 (8h 10m, not 8h 40m); Saturday 15:45 too, instead of 14:45 (8h 10m, not 9h 10m); Sunday 15:15 to 23:25 instead of 14:30 (8h 10m, not 8h 55m). Some earlies go the other way: two new weekday earlies, 06:20–15:15 and 07:00–15:45, are 8h 55m and 8h 45m — about 40 a year each — where no early today is longer than 8h 30m. Be upfront about the two minutes on the average: the 26-week link may have no more than 219 contracted days a year, so the same 35 hours go into slightly fewer, slightly longer shifts. Nothing runs over 9 hours.</a:t>
+              <a:t>Lead with the closers: they are the shifts people dislike most, and every one of them is shorter. Weekday 15:45 to 23:55 instead of 15:15 (8h 10m, not 8h 40m); Saturday 15:45 too, instead of 14:45 (8h 10m, not 9h 10m); Sunday 15:15 to 23:25 instead of 14:30 (8h 10m, not 8h 55m). Some earlies go the other way: two new weekday earlies, 06:20–15:15 and 07:00–15:45, are 8h 55m and 8h 45m, each about 20 a year — 40 in all — where no early today is longer than 8h 30m. Be upfront about the two minutes on the average: the 26-week link may have no more than 219 contracted days a year, so the same 35 hours go into slightly fewer, slightly longer shifts. Nothing runs over 9 hours.</a:t>
             </a:r>
             <a:endParaRPr lang="en-US" dirty="0"/>
           </a:p>
@@ -1572,7 +1572,7 @@
           <a:p>
             <a:r>
               <a:rPr lang="en-US" dirty="0"/>
-              <a:t>Be straight about this one. About three more a year each finish at 23:00 or later, and all of that comes from the December rules: three on duty to the close every day, where today’s weekdays have two. With In Step the only people who finish after 23:00 are those three closers, so no link that meets the rules on 26 weeks can have fewer. Finishes at 22:00 or later go up more, from 78 to 94 a year: the rules also want five still on duty after 22:00, and two weekday lates finish at 22:30 with the ticket office. Early 06:20 starts hardly change. And because the shortest gap between two shifts is 14h 35m, nobody finishes late and starts early the next morning. The yearly figures are averages from the fixed rota; a cover week’s duties are not known yet and are left out.</a:t>
+              <a:t>Be straight about this one. About three more a year each finish at 23:00 or later, and all of that comes from the December rules: three on duty to the close every day, where today has two Monday to Saturday. With In Step the only people who finish after 23:00 are those three closers, so no link that meets the rules on 26 weeks can have fewer. Finishes at 22:00 or later go up more, from 78 to 94 a year: the rules also want five still on duty after 22:00, and two weekday lates finish at 22:30 with the ticket office. Early 06:20 starts hardly change. And because the shortest gap between two shifts is 14h 35m, nobody finishes late and starts early the next morning. The yearly figures are the fixed rota’s, which everyone works through twice a year; a cover week’s duties are not known yet and are left out.</a:t>
             </a:r>
             <a:endParaRPr lang="en-US" dirty="0"/>
           </a:p>
@@ -8949,7 +8949,7 @@
                 <a:ea typeface="Inter" pitchFamily="34" charset="-122"/>
                 <a:cs typeface="Inter" pitchFamily="34" charset="-120"/>
               </a:rPr>
-              <a:t>At least 10 on a Sunday, and more at the open and the close. We also aim for 14 on a Saturday.</a:t>
+              <a:t>At least 10 on a Sunday, and more at the close and at 22:00. We also aim for 14 on a Saturday.</a:t>
             </a:r>
             <a:endParaRPr lang="en-US" sz="1300" dirty="0"/>
           </a:p>

--- a/docs/links-26/presentations/In-Step-for-colleagues.pptx
+++ b/docs/links-26/presentations/In-Step-for-colleagues.pptx
@@ -780,7 +780,7 @@
           <a:p>
             <a:r>
               <a:rPr lang="en-US" dirty="0"/>
-              <a:t>The Office of Rail and Road and the rail industry publish lists of rota patterns that tend to tire people. Today’s link shows four of them in the fixed rota (up to five where a cover week falls badly); In Step shows none. Two more — early starts and a weekly rotation — come with every weekly link at a 06:20 station, so they are listed on the sheet for information but not counted against any design.</a:t>
+              <a:t>The Office of Rail and Road and the rail industry publish lists of rota patterns that tend to tire people. Today’s link shows four of them in the fixed rota (up to five where a cover week falls badly); In Step shows none. Two more — early starts and a weekly rotation — come with every weekly link at a 06:20 station, so they are listed on the sheet for information but not counted against any design. The “up to 1” beside the fatigue warnings is a 55-hour week. If a cover week’s four duties come straight after a busy week, and its Sunday is worked as overtime too, those seven days can come to 56.3 hours, which the rail industry’s guidance flags. Where the four fall, and whether the Sunday is worked, is for the roster office.</a:t>
             </a:r>
             <a:endParaRPr lang="en-US" dirty="0"/>
           </a:p>
@@ -1132,7 +1132,7 @@
           <a:p>
             <a:r>
               <a:rPr lang="en-US" dirty="0"/>
-              <a:t>This is the whole pitch on one slide. Same 35-hour week as now. Never more than five days in a row on the fixed rota — six at most when a cover week falls badly, where today it is seven and can reach nine. Seven full weekends off in every 26 weeks, against four in 20 today, and never more than five weeks apart — though each person works about two more Saturdays a year. Every working week is all earlies or all lates, and 18 of the 21 working weeks keep one shift time Monday to Friday. Nine of the fifteen shift times are ones people already work, today’s 13:45 finish among them. And every closing shift is shorter: the weekday closer by 30 minutes, the Saturday closer by an hour and the Sunday closer by 45 minutes. Say the leave cost here too, before anyone asks: four full weeks off, Sunday to Saturday, takes 15 days’ leave rather than 14, and the best 14-day stretch is 28 days off rather than 30; the average is the same and the worst a day better. A cover week is one of the five weeks in 26 with no fixed shifts: its four duties are placed later to cover leave and sickness; the fixed rota is the other 21 weeks, whose shifts are set.</a:t>
+              <a:t>This is the whole pitch on one slide. Same 35-hour week as now. Never more than five days in a row on the fixed rota — seven at most when a cover week falls badly and its Sunday is worked as overtime, where today it is seven and can reach nine. Seven full weekends off in every 26 weeks, against four in 20 today, and never more than five weeks apart — though each person works about two more Saturdays a year. Every working week is all earlies or all lates, and 18 of the 21 working weeks keep one shift time Monday to Friday. Nine of the fifteen shift times are ones people already work, today’s 13:45 finish among them. And every closing shift is shorter: the weekday closer by 30 minutes, the Saturday closer by an hour and the Sunday closer by 45 minutes. Say the leave cost here too, before anyone asks: four full weeks off, Sunday to Saturday, takes 15 days’ leave rather than 14, and the best 14-day stretch is 28 days off rather than 30; the average is the same and the worst a day better. A cover week is one of the five weeks in 26 with no fixed shifts: its four duties are placed later to cover leave and sickness; the fixed rota is the other 21 weeks, whose shifts are set.</a:t>
             </a:r>
             <a:endParaRPr lang="en-US" dirty="0"/>
           </a:p>
@@ -1748,7 +1748,7 @@
           <a:p>
             <a:r>
               <a:rPr lang="en-US" dirty="0"/>
-              <a:t>A full weekend is Saturday and the following Sunday both off. Today that is 4 weekends in a 20-week cycle; In Step gives 7 in 26, and they are never more than five weeks apart, against seven today. Five is as close as they can be: a full weekend cannot start in a cover week or the week before one, so only 16 of the 26 weeks can begin one. Nobody works more than five days in a row on the fixed rota — today it is seven — and six is the most a badly placed cover week can make it. Every working week is all earlies or all lates — today seven weeks in 16 mix the two — and 18 of the 21 keep the same shift time Monday to Friday. Rest days mostly come in pairs: 22 of the 26 rest-day breaks are two days or more, against 13 of 17 today, and single rest days stay at four, as today. There are no six-day weeks (today there is one).</a:t>
+              <a:t>A full weekend is Saturday and the following Sunday both off. Today that is 4 weekends in a 20-week cycle; In Step gives 7 in 26, and they are never more than five weeks apart, against seven today. Five is as close as they can be: a full weekend cannot start in a cover week or the week before one, so only 16 of the 26 weeks can begin one. Nobody works more than five days in a row on the fixed rota — today it is seven — and seven is the most a badly placed cover week can make it, with its Sunday worked as overtime. Every working week is all earlies or all lates — today seven weeks in 16 mix the two — and 18 of the 21 keep the same shift time Monday to Friday. Rest days mostly come in pairs: 22 of the 26 rest-day breaks are two days or more, against 13 of 17 today, and single rest days stay at four, as today. There are no six-day weeks (today there is one).</a:t>
             </a:r>
             <a:endParaRPr lang="en-US" dirty="0"/>
           </a:p>
@@ -4153,7 +4153,7 @@
                 <a:ea typeface="Inter" pitchFamily="34" charset="-122"/>
                 <a:cs typeface="Inter" pitchFamily="34" charset="-120"/>
               </a:rPr>
-              <a:t>0</a:t>
+              <a:t>0 (up to 1)</a:t>
             </a:r>
             <a:endParaRPr lang="en-US" sz="1800" dirty="0"/>
           </a:p>
@@ -6383,7 +6383,7 @@
                           <a:ea typeface="Inter" pitchFamily="34" charset="-122"/>
                           <a:cs typeface="Inter" pitchFamily="34" charset="-120"/>
                         </a:rPr>
-                        <a:t>5 (up to 6)</a:t>
+                        <a:t>5 (up to 7)</a:t>
                       </a:r>
                       <a:endParaRPr lang="en-US" sz="1200" dirty="0">
                         <a:latin typeface="Inter" charset="0"/>
@@ -7063,7 +7063,7 @@
                           <a:ea typeface="Inter" pitchFamily="34" charset="-122"/>
                           <a:cs typeface="Inter" pitchFamily="34" charset="-120"/>
                         </a:rPr>
-                        <a:t>0</a:t>
+                        <a:t>0 (up to 1)</a:t>
                       </a:r>
                       <a:endParaRPr lang="en-US" sz="1200" dirty="0">
                         <a:latin typeface="Inter" charset="0"/>
@@ -7879,7 +7879,7 @@
                 <a:ea typeface="Inter" pitchFamily="34" charset="-122"/>
                 <a:cs typeface="Inter" pitchFamily="34" charset="-120"/>
               </a:rPr>
-              <a:t>up to 6 · today 7</a:t>
+              <a:t>up to 7 · today 7</a:t>
             </a:r>
             <a:endParaRPr lang="en-US" sz="1200" dirty="0"/>
           </a:p>
@@ -13894,7 +13894,7 @@
                 <a:ea typeface="Inter" pitchFamily="34" charset="-122"/>
                 <a:cs typeface="Inter" pitchFamily="34" charset="-120"/>
               </a:rPr>
-              <a:t>5 (up to 6)</a:t>
+              <a:t>5 (up to 7)</a:t>
             </a:r>
             <a:endParaRPr lang="en-US" sz="1800" dirty="0"/>
           </a:p>

--- a/docs/links-26/presentations/In-Step-for-colleagues.pptx
+++ b/docs/links-26/presentations/In-Step-for-colleagues.pptx
@@ -692,7 +692,7 @@
           <a:p>
             <a:r>
               <a:rPr lang="en-US" dirty="0"/>
-              <a:t>Leave is only needed on working days Monday to Saturday; rest days and Sundays cost nothing. Today there is one unusual stretch of the roster where 14 days buys 30 days off — In Step spreads rest days more evenly, so its best is 28. On average it is the same, 23.4 days, and at its worst it is a day better than today. Four full weeks off (Sunday to Saturday) takes at least 15 days of leave, instead of 14 at best today. Say the four-weeks figure plainly: both shortlisted links are worse than today here (Long Break, the leave-first design in the pack, keeps the 14), and people plan a year around it. The averages depend on where you count a booking as starting, so quote those as “about the same”.</a:t>
+              <a:t>Leave is only needed on working days Monday to Saturday; rest days and Sundays cost nothing. Today there is one unusual stretch of the roster where 14 days buys 30 days off — In Step spreads rest days more evenly, so its best is 28. On average it is the same, 23.4 days, and at its worst it is a day better than today. Four full weeks off (Sunday to Saturday) takes at least 15 days of leave, instead of 14 at best today. Say the four-weeks figure plainly: all three shortlisted links are worse than today here (Long Break, the leave-first design in the pack, keeps the 14), and people plan a year around it. The averages depend on where you count a booking as starting, so quote those as “about the same”.</a:t>
             </a:r>
             <a:endParaRPr lang="en-US" dirty="0"/>
           </a:p>

--- a/docs/links-26/presentations/In-Step-for-colleagues.pptx
+++ b/docs/links-26/presentations/In-Step-for-colleagues.pptx
@@ -2481,7 +2481,7 @@
                 <a:ea typeface="Inter" pitchFamily="34" charset="-122"/>
                 <a:cs typeface="Inter" pitchFamily="34" charset="-120"/>
               </a:rPr>
-              <a:t>14 full weekends off a year, at most five weeks apart; blocks of earlies or lates up to 5 weeks, 7 if the cover weeks go the same way.</a:t>
+              <a:t>Blocks of earlies or lates up to 5 weeks, 7 if the cover weeks go the same way; a full weekend off comes round at least every 5 weeks.</a:t>
             </a:r>
             <a:endParaRPr lang="en-US" sz="1400" dirty="0"/>
           </a:p>
@@ -2723,11 +2723,11 @@
         <p:spPr>
           <a:xfrm>
             <a:off x="457200" y="1801368"/>
-            <a:ext cx="8229600" cy="365760"/>
+            <a:ext cx="8229600" cy="461176"/>
           </a:xfrm>
           <a:prstGeom prst="roundRect">
             <a:avLst>
-              <a:gd name="adj" fmla="val 11538"/>
+              <a:gd name="adj" fmla="val 9151"/>
             </a:avLst>
           </a:prstGeom>
           <a:solidFill>
@@ -2750,7 +2750,7 @@
         <p:spPr>
           <a:xfrm>
             <a:off x="640080" y="1801368"/>
-            <a:ext cx="4023360" cy="365760"/>
+            <a:ext cx="4023360" cy="461176"/>
           </a:xfrm>
           <a:prstGeom prst="rect">
             <a:avLst/>
@@ -2789,7 +2789,7 @@
         <p:spPr>
           <a:xfrm>
             <a:off x="4663440" y="1801368"/>
-            <a:ext cx="2011680" cy="365760"/>
+            <a:ext cx="2011680" cy="461176"/>
           </a:xfrm>
           <a:prstGeom prst="rect">
             <a:avLst/>
@@ -2828,7 +2828,7 @@
         <p:spPr>
           <a:xfrm>
             <a:off x="6675120" y="1801368"/>
-            <a:ext cx="2011680" cy="365760"/>
+            <a:ext cx="2011680" cy="461176"/>
           </a:xfrm>
           <a:prstGeom prst="rect">
             <a:avLst/>
@@ -2866,12 +2866,12 @@
         </p:nvSpPr>
         <p:spPr>
           <a:xfrm>
-            <a:off x="457200" y="2240280"/>
-            <a:ext cx="8229600" cy="365760"/>
+            <a:off x="457200" y="2354779"/>
+            <a:ext cx="8229600" cy="461176"/>
           </a:xfrm>
           <a:prstGeom prst="roundRect">
             <a:avLst>
-              <a:gd name="adj" fmla="val 11538"/>
+              <a:gd name="adj" fmla="val 9151"/>
             </a:avLst>
           </a:prstGeom>
           <a:solidFill>
@@ -2893,8 +2893,8 @@
         </p:nvSpPr>
         <p:spPr>
           <a:xfrm>
-            <a:off x="640080" y="2240280"/>
-            <a:ext cx="4023360" cy="365760"/>
+            <a:off x="640080" y="2354779"/>
+            <a:ext cx="4023360" cy="461176"/>
           </a:xfrm>
           <a:prstGeom prst="rect">
             <a:avLst/>
@@ -2932,8 +2932,8 @@
         </p:nvSpPr>
         <p:spPr>
           <a:xfrm>
-            <a:off x="4663440" y="2240280"/>
-            <a:ext cx="2011680" cy="365760"/>
+            <a:off x="4663440" y="2354779"/>
+            <a:ext cx="2011680" cy="461176"/>
           </a:xfrm>
           <a:prstGeom prst="rect">
             <a:avLst/>
@@ -2971,8 +2971,8 @@
         </p:nvSpPr>
         <p:spPr>
           <a:xfrm>
-            <a:off x="6675120" y="2240280"/>
-            <a:ext cx="2011680" cy="365760"/>
+            <a:off x="6675120" y="2354779"/>
+            <a:ext cx="2011680" cy="461176"/>
           </a:xfrm>
           <a:prstGeom prst="rect">
             <a:avLst/>
@@ -3010,12 +3010,12 @@
         </p:nvSpPr>
         <p:spPr>
           <a:xfrm>
-            <a:off x="457200" y="2679192"/>
-            <a:ext cx="8229600" cy="365760"/>
+            <a:off x="457200" y="2908190"/>
+            <a:ext cx="8229600" cy="461176"/>
           </a:xfrm>
           <a:prstGeom prst="roundRect">
             <a:avLst>
-              <a:gd name="adj" fmla="val 11538"/>
+              <a:gd name="adj" fmla="val 9151"/>
             </a:avLst>
           </a:prstGeom>
           <a:solidFill>
@@ -3037,8 +3037,8 @@
         </p:nvSpPr>
         <p:spPr>
           <a:xfrm>
-            <a:off x="640080" y="2679192"/>
-            <a:ext cx="4023360" cy="365760"/>
+            <a:off x="640080" y="2908190"/>
+            <a:ext cx="4023360" cy="461176"/>
           </a:xfrm>
           <a:prstGeom prst="rect">
             <a:avLst/>
@@ -3076,8 +3076,8 @@
         </p:nvSpPr>
         <p:spPr>
           <a:xfrm>
-            <a:off x="4663440" y="2679192"/>
-            <a:ext cx="2011680" cy="365760"/>
+            <a:off x="4663440" y="2908190"/>
+            <a:ext cx="2011680" cy="461176"/>
           </a:xfrm>
           <a:prstGeom prst="rect">
             <a:avLst/>
@@ -3115,8 +3115,8 @@
         </p:nvSpPr>
         <p:spPr>
           <a:xfrm>
-            <a:off x="6675120" y="2679192"/>
-            <a:ext cx="2011680" cy="365760"/>
+            <a:off x="6675120" y="2908190"/>
+            <a:ext cx="2011680" cy="461176"/>
           </a:xfrm>
           <a:prstGeom prst="rect">
             <a:avLst/>
@@ -3154,12 +3154,12 @@
         </p:nvSpPr>
         <p:spPr>
           <a:xfrm>
-            <a:off x="457200" y="3118104"/>
-            <a:ext cx="8229600" cy="365760"/>
+            <a:off x="457200" y="3461601"/>
+            <a:ext cx="8229600" cy="461176"/>
           </a:xfrm>
           <a:prstGeom prst="roundRect">
             <a:avLst>
-              <a:gd name="adj" fmla="val 11538"/>
+              <a:gd name="adj" fmla="val 9151"/>
             </a:avLst>
           </a:prstGeom>
           <a:solidFill>
@@ -3181,8 +3181,8 @@
         </p:nvSpPr>
         <p:spPr>
           <a:xfrm>
-            <a:off x="640080" y="3118104"/>
-            <a:ext cx="4023360" cy="365760"/>
+            <a:off x="640080" y="3461601"/>
+            <a:ext cx="4023360" cy="461176"/>
           </a:xfrm>
           <a:prstGeom prst="rect">
             <a:avLst/>
@@ -3220,8 +3220,8 @@
         </p:nvSpPr>
         <p:spPr>
           <a:xfrm>
-            <a:off x="4663440" y="3118104"/>
-            <a:ext cx="2011680" cy="365760"/>
+            <a:off x="4663440" y="3461601"/>
+            <a:ext cx="2011680" cy="461176"/>
           </a:xfrm>
           <a:prstGeom prst="rect">
             <a:avLst/>
@@ -3259,8 +3259,8 @@
         </p:nvSpPr>
         <p:spPr>
           <a:xfrm>
-            <a:off x="6675120" y="3118104"/>
-            <a:ext cx="2011680" cy="365760"/>
+            <a:off x="6675120" y="3461601"/>
+            <a:ext cx="2011680" cy="461176"/>
           </a:xfrm>
           <a:prstGeom prst="rect">
             <a:avLst/>
@@ -3592,11 +3592,11 @@
         <p:spPr>
           <a:xfrm>
             <a:off x="457200" y="1801368"/>
-            <a:ext cx="8229600" cy="365760"/>
+            <a:ext cx="8229600" cy="461176"/>
           </a:xfrm>
           <a:prstGeom prst="roundRect">
             <a:avLst>
-              <a:gd name="adj" fmla="val 11538"/>
+              <a:gd name="adj" fmla="val 9151"/>
             </a:avLst>
           </a:prstGeom>
           <a:solidFill>
@@ -3619,7 +3619,7 @@
         <p:spPr>
           <a:xfrm>
             <a:off x="640080" y="1801368"/>
-            <a:ext cx="4023360" cy="365760"/>
+            <a:ext cx="4023360" cy="461176"/>
           </a:xfrm>
           <a:prstGeom prst="rect">
             <a:avLst/>
@@ -3658,7 +3658,7 @@
         <p:spPr>
           <a:xfrm>
             <a:off x="4663440" y="1801368"/>
-            <a:ext cx="2011680" cy="365760"/>
+            <a:ext cx="2011680" cy="461176"/>
           </a:xfrm>
           <a:prstGeom prst="rect">
             <a:avLst/>
@@ -3697,7 +3697,7 @@
         <p:spPr>
           <a:xfrm>
             <a:off x="6675120" y="1801368"/>
-            <a:ext cx="2011680" cy="365760"/>
+            <a:ext cx="2011680" cy="461176"/>
           </a:xfrm>
           <a:prstGeom prst="rect">
             <a:avLst/>
@@ -3735,12 +3735,12 @@
         </p:nvSpPr>
         <p:spPr>
           <a:xfrm>
-            <a:off x="457200" y="2240280"/>
-            <a:ext cx="8229600" cy="365760"/>
+            <a:off x="457200" y="2354779"/>
+            <a:ext cx="8229600" cy="461176"/>
           </a:xfrm>
           <a:prstGeom prst="roundRect">
             <a:avLst>
-              <a:gd name="adj" fmla="val 11538"/>
+              <a:gd name="adj" fmla="val 9151"/>
             </a:avLst>
           </a:prstGeom>
           <a:solidFill>
@@ -3762,8 +3762,8 @@
         </p:nvSpPr>
         <p:spPr>
           <a:xfrm>
-            <a:off x="640080" y="2240280"/>
-            <a:ext cx="4023360" cy="365760"/>
+            <a:off x="640080" y="2354779"/>
+            <a:ext cx="4023360" cy="461176"/>
           </a:xfrm>
           <a:prstGeom prst="rect">
             <a:avLst/>
@@ -3801,8 +3801,8 @@
         </p:nvSpPr>
         <p:spPr>
           <a:xfrm>
-            <a:off x="4663440" y="2240280"/>
-            <a:ext cx="2011680" cy="365760"/>
+            <a:off x="4663440" y="2354779"/>
+            <a:ext cx="2011680" cy="461176"/>
           </a:xfrm>
           <a:prstGeom prst="rect">
             <a:avLst/>
@@ -3840,8 +3840,8 @@
         </p:nvSpPr>
         <p:spPr>
           <a:xfrm>
-            <a:off x="6675120" y="2240280"/>
-            <a:ext cx="2011680" cy="365760"/>
+            <a:off x="6675120" y="2354779"/>
+            <a:ext cx="2011680" cy="461176"/>
           </a:xfrm>
           <a:prstGeom prst="rect">
             <a:avLst/>
@@ -3879,12 +3879,12 @@
         </p:nvSpPr>
         <p:spPr>
           <a:xfrm>
-            <a:off x="457200" y="2679192"/>
-            <a:ext cx="8229600" cy="365760"/>
+            <a:off x="457200" y="2908190"/>
+            <a:ext cx="8229600" cy="461176"/>
           </a:xfrm>
           <a:prstGeom prst="roundRect">
             <a:avLst>
-              <a:gd name="adj" fmla="val 11538"/>
+              <a:gd name="adj" fmla="val 9151"/>
             </a:avLst>
           </a:prstGeom>
           <a:solidFill>
@@ -3906,8 +3906,8 @@
         </p:nvSpPr>
         <p:spPr>
           <a:xfrm>
-            <a:off x="640080" y="2679192"/>
-            <a:ext cx="4023360" cy="365760"/>
+            <a:off x="640080" y="2908190"/>
+            <a:ext cx="4023360" cy="461176"/>
           </a:xfrm>
           <a:prstGeom prst="rect">
             <a:avLst/>
@@ -3945,8 +3945,8 @@
         </p:nvSpPr>
         <p:spPr>
           <a:xfrm>
-            <a:off x="4663440" y="2679192"/>
-            <a:ext cx="2011680" cy="365760"/>
+            <a:off x="4663440" y="2908190"/>
+            <a:ext cx="2011680" cy="461176"/>
           </a:xfrm>
           <a:prstGeom prst="rect">
             <a:avLst/>
@@ -3984,8 +3984,8 @@
         </p:nvSpPr>
         <p:spPr>
           <a:xfrm>
-            <a:off x="6675120" y="2679192"/>
-            <a:ext cx="2011680" cy="365760"/>
+            <a:off x="6675120" y="2908190"/>
+            <a:ext cx="2011680" cy="461176"/>
           </a:xfrm>
           <a:prstGeom prst="rect">
             <a:avLst/>
@@ -4023,12 +4023,12 @@
         </p:nvSpPr>
         <p:spPr>
           <a:xfrm>
-            <a:off x="457200" y="3118104"/>
-            <a:ext cx="8229600" cy="365760"/>
+            <a:off x="457200" y="3461601"/>
+            <a:ext cx="8229600" cy="461176"/>
           </a:xfrm>
           <a:prstGeom prst="roundRect">
             <a:avLst>
-              <a:gd name="adj" fmla="val 11538"/>
+              <a:gd name="adj" fmla="val 9151"/>
             </a:avLst>
           </a:prstGeom>
           <a:solidFill>
@@ -4050,8 +4050,8 @@
         </p:nvSpPr>
         <p:spPr>
           <a:xfrm>
-            <a:off x="640080" y="3118104"/>
-            <a:ext cx="4023360" cy="365760"/>
+            <a:off x="640080" y="3461601"/>
+            <a:ext cx="4023360" cy="461176"/>
           </a:xfrm>
           <a:prstGeom prst="rect">
             <a:avLst/>
@@ -4089,8 +4089,8 @@
         </p:nvSpPr>
         <p:spPr>
           <a:xfrm>
-            <a:off x="4663440" y="3118104"/>
-            <a:ext cx="2011680" cy="365760"/>
+            <a:off x="4663440" y="3461601"/>
+            <a:ext cx="2011680" cy="461176"/>
           </a:xfrm>
           <a:prstGeom prst="rect">
             <a:avLst/>
@@ -4128,8 +4128,8 @@
         </p:nvSpPr>
         <p:spPr>
           <a:xfrm>
-            <a:off x="6675120" y="3118104"/>
-            <a:ext cx="2011680" cy="365760"/>
+            <a:off x="6675120" y="3461601"/>
+            <a:ext cx="2011680" cy="461176"/>
           </a:xfrm>
           <a:prstGeom prst="rect">
             <a:avLst/>
@@ -9382,11 +9382,11 @@
         <p:spPr>
           <a:xfrm>
             <a:off x="457200" y="1801368"/>
-            <a:ext cx="8229600" cy="365760"/>
+            <a:ext cx="8229600" cy="623944"/>
           </a:xfrm>
           <a:prstGeom prst="roundRect">
             <a:avLst>
-              <a:gd name="adj" fmla="val 11538"/>
+              <a:gd name="adj" fmla="val 6764"/>
             </a:avLst>
           </a:prstGeom>
           <a:solidFill>
@@ -9409,7 +9409,7 @@
         <p:spPr>
           <a:xfrm>
             <a:off x="640080" y="1801368"/>
-            <a:ext cx="4023360" cy="365760"/>
+            <a:ext cx="4023360" cy="623944"/>
           </a:xfrm>
           <a:prstGeom prst="rect">
             <a:avLst/>
@@ -9425,7 +9425,7 @@
               <a:buNone/>
             </a:pPr>
             <a:r>
-              <a:rPr lang="en-US" sz="1400" dirty="0">
+              <a:rPr lang="en-US" sz="1600" dirty="0">
                 <a:solidFill>
                   <a:srgbClr val="1B2533"/>
                 </a:solidFill>
@@ -9435,7 +9435,7 @@
               </a:rPr>
               <a:t>Contracted hours a week</a:t>
             </a:r>
-            <a:endParaRPr lang="en-US" sz="1400" dirty="0"/>
+            <a:endParaRPr lang="en-US" sz="1600" dirty="0"/>
           </a:p>
         </p:txBody>
       </p:sp>
@@ -9448,7 +9448,7 @@
         <p:spPr>
           <a:xfrm>
             <a:off x="4663440" y="1801368"/>
-            <a:ext cx="2011680" cy="365760"/>
+            <a:ext cx="2011680" cy="623944"/>
           </a:xfrm>
           <a:prstGeom prst="rect">
             <a:avLst/>
@@ -9464,7 +9464,7 @@
               <a:buNone/>
             </a:pPr>
             <a:r>
-              <a:rPr lang="en-US" sz="1600" dirty="0">
+              <a:rPr lang="en-US" sz="1800" dirty="0">
                 <a:solidFill>
                   <a:srgbClr val="5B6778"/>
                 </a:solidFill>
@@ -9474,7 +9474,7 @@
               </a:rPr>
               <a:t>35h</a:t>
             </a:r>
-            <a:endParaRPr lang="en-US" sz="1600" dirty="0"/>
+            <a:endParaRPr lang="en-US" sz="1800" dirty="0"/>
           </a:p>
         </p:txBody>
       </p:sp>
@@ -9487,7 +9487,7 @@
         <p:spPr>
           <a:xfrm>
             <a:off x="6675120" y="1801368"/>
-            <a:ext cx="2011680" cy="365760"/>
+            <a:ext cx="2011680" cy="623944"/>
           </a:xfrm>
           <a:prstGeom prst="rect">
             <a:avLst/>
@@ -9503,7 +9503,7 @@
               <a:buNone/>
             </a:pPr>
             <a:r>
-              <a:rPr lang="en-US" sz="1800" b="1" dirty="0">
+              <a:rPr lang="en-US" sz="2000" b="1" dirty="0">
                 <a:solidFill>
                   <a:srgbClr val="001E3C"/>
                 </a:solidFill>
@@ -9513,7 +9513,7 @@
               </a:rPr>
               <a:t>35h</a:t>
             </a:r>
-            <a:endParaRPr lang="en-US" sz="1800" dirty="0"/>
+            <a:endParaRPr lang="en-US" sz="2000" dirty="0"/>
           </a:p>
         </p:txBody>
       </p:sp>
@@ -9525,12 +9525,12 @@
         </p:nvSpPr>
         <p:spPr>
           <a:xfrm>
-            <a:off x="457200" y="2240280"/>
-            <a:ext cx="8229600" cy="365760"/>
+            <a:off x="457200" y="2550101"/>
+            <a:ext cx="8229600" cy="623944"/>
           </a:xfrm>
           <a:prstGeom prst="roundRect">
             <a:avLst>
-              <a:gd name="adj" fmla="val 11538"/>
+              <a:gd name="adj" fmla="val 6764"/>
             </a:avLst>
           </a:prstGeom>
           <a:solidFill>
@@ -9552,8 +9552,8 @@
         </p:nvSpPr>
         <p:spPr>
           <a:xfrm>
-            <a:off x="640080" y="2240280"/>
-            <a:ext cx="4023360" cy="365760"/>
+            <a:off x="640080" y="2550101"/>
+            <a:ext cx="4023360" cy="623944"/>
           </a:xfrm>
           <a:prstGeom prst="rect">
             <a:avLst/>
@@ -9569,7 +9569,7 @@
               <a:buNone/>
             </a:pPr>
             <a:r>
-              <a:rPr lang="en-US" sz="1400" dirty="0">
+              <a:rPr lang="en-US" sz="1600" dirty="0">
                 <a:solidFill>
                   <a:srgbClr val="1B2533"/>
                 </a:solidFill>
@@ -9579,7 +9579,7 @@
               </a:rPr>
               <a:t>Contracted days at work a week</a:t>
             </a:r>
-            <a:endParaRPr lang="en-US" sz="1400" dirty="0"/>
+            <a:endParaRPr lang="en-US" sz="1600" dirty="0"/>
           </a:p>
         </p:txBody>
       </p:sp>
@@ -9591,8 +9591,8 @@
         </p:nvSpPr>
         <p:spPr>
           <a:xfrm>
-            <a:off x="4663440" y="2240280"/>
-            <a:ext cx="2011680" cy="365760"/>
+            <a:off x="4663440" y="2550101"/>
+            <a:ext cx="2011680" cy="623944"/>
           </a:xfrm>
           <a:prstGeom prst="rect">
             <a:avLst/>
@@ -9608,7 +9608,7 @@
               <a:buNone/>
             </a:pPr>
             <a:r>
-              <a:rPr lang="en-US" sz="1600" dirty="0">
+              <a:rPr lang="en-US" sz="1800" dirty="0">
                 <a:solidFill>
                   <a:srgbClr val="5B6778"/>
                 </a:solidFill>
@@ -9618,7 +9618,7 @@
               </a:rPr>
               <a:t>4.20</a:t>
             </a:r>
-            <a:endParaRPr lang="en-US" sz="1600" dirty="0"/>
+            <a:endParaRPr lang="en-US" sz="1800" dirty="0"/>
           </a:p>
         </p:txBody>
       </p:sp>
@@ -9630,8 +9630,8 @@
         </p:nvSpPr>
         <p:spPr>
           <a:xfrm>
-            <a:off x="6675120" y="2240280"/>
-            <a:ext cx="2011680" cy="365760"/>
+            <a:off x="6675120" y="2550101"/>
+            <a:ext cx="2011680" cy="623944"/>
           </a:xfrm>
           <a:prstGeom prst="rect">
             <a:avLst/>
@@ -9647,7 +9647,7 @@
               <a:buNone/>
             </a:pPr>
             <a:r>
-              <a:rPr lang="en-US" sz="1800" b="1" dirty="0">
+              <a:rPr lang="en-US" sz="2000" b="1" dirty="0">
                 <a:solidFill>
                   <a:srgbClr val="001E3C"/>
                 </a:solidFill>
@@ -9657,7 +9657,7 @@
               </a:rPr>
               <a:t>4.19</a:t>
             </a:r>
-            <a:endParaRPr lang="en-US" sz="1800" dirty="0"/>
+            <a:endParaRPr lang="en-US" sz="2000" dirty="0"/>
           </a:p>
         </p:txBody>
       </p:sp>
@@ -9669,12 +9669,12 @@
         </p:nvSpPr>
         <p:spPr>
           <a:xfrm>
-            <a:off x="457200" y="2679192"/>
-            <a:ext cx="8229600" cy="365760"/>
+            <a:off x="457200" y="3298834"/>
+            <a:ext cx="8229600" cy="623944"/>
           </a:xfrm>
           <a:prstGeom prst="roundRect">
             <a:avLst>
-              <a:gd name="adj" fmla="val 11538"/>
+              <a:gd name="adj" fmla="val 6764"/>
             </a:avLst>
           </a:prstGeom>
           <a:solidFill>
@@ -9696,8 +9696,8 @@
         </p:nvSpPr>
         <p:spPr>
           <a:xfrm>
-            <a:off x="640080" y="2679192"/>
-            <a:ext cx="4023360" cy="365760"/>
+            <a:off x="640080" y="3298834"/>
+            <a:ext cx="4023360" cy="623944"/>
           </a:xfrm>
           <a:prstGeom prst="rect">
             <a:avLst/>
@@ -9713,7 +9713,7 @@
               <a:buNone/>
             </a:pPr>
             <a:r>
-              <a:rPr lang="en-US" sz="1400" dirty="0">
+              <a:rPr lang="en-US" sz="1600" dirty="0">
                 <a:solidFill>
                   <a:srgbClr val="1B2533"/>
                 </a:solidFill>
@@ -9723,7 +9723,7 @@
               </a:rPr>
               <a:t>Contracted days at work a year</a:t>
             </a:r>
-            <a:endParaRPr lang="en-US" sz="1400" dirty="0"/>
+            <a:endParaRPr lang="en-US" sz="1600" dirty="0"/>
           </a:p>
         </p:txBody>
       </p:sp>
@@ -9735,8 +9735,8 @@
         </p:nvSpPr>
         <p:spPr>
           <a:xfrm>
-            <a:off x="4663440" y="2679192"/>
-            <a:ext cx="2011680" cy="365760"/>
+            <a:off x="4663440" y="3298834"/>
+            <a:ext cx="2011680" cy="623944"/>
           </a:xfrm>
           <a:prstGeom prst="rect">
             <a:avLst/>
@@ -9752,7 +9752,7 @@
               <a:buNone/>
             </a:pPr>
             <a:r>
-              <a:rPr lang="en-US" sz="1600" dirty="0">
+              <a:rPr lang="en-US" sz="1800" dirty="0">
                 <a:solidFill>
                   <a:srgbClr val="5B6778"/>
                 </a:solidFill>
@@ -9762,7 +9762,7 @@
               </a:rPr>
               <a:t>219.0</a:t>
             </a:r>
-            <a:endParaRPr lang="en-US" sz="1600" dirty="0"/>
+            <a:endParaRPr lang="en-US" sz="1800" dirty="0"/>
           </a:p>
         </p:txBody>
       </p:sp>
@@ -9774,8 +9774,8 @@
         </p:nvSpPr>
         <p:spPr>
           <a:xfrm>
-            <a:off x="6675120" y="2679192"/>
-            <a:ext cx="2011680" cy="365760"/>
+            <a:off x="6675120" y="3298834"/>
+            <a:ext cx="2011680" cy="623944"/>
           </a:xfrm>
           <a:prstGeom prst="rect">
             <a:avLst/>
@@ -9791,7 +9791,7 @@
               <a:buNone/>
             </a:pPr>
             <a:r>
-              <a:rPr lang="en-US" sz="1800" b="1" dirty="0">
+              <a:rPr lang="en-US" sz="2000" b="1" dirty="0">
                 <a:solidFill>
                   <a:srgbClr val="001E3C"/>
                 </a:solidFill>
@@ -9801,7 +9801,7 @@
               </a:rPr>
               <a:t>218.6</a:t>
             </a:r>
-            <a:endParaRPr lang="en-US" sz="1800" dirty="0"/>
+            <a:endParaRPr lang="en-US" sz="2000" dirty="0"/>
           </a:p>
         </p:txBody>
       </p:sp>
@@ -10107,11 +10107,11 @@
         <p:spPr>
           <a:xfrm>
             <a:off x="457200" y="1801368"/>
-            <a:ext cx="8229600" cy="365760"/>
+            <a:ext cx="8229600" cy="623944"/>
           </a:xfrm>
           <a:prstGeom prst="roundRect">
             <a:avLst>
-              <a:gd name="adj" fmla="val 11538"/>
+              <a:gd name="adj" fmla="val 6764"/>
             </a:avLst>
           </a:prstGeom>
           <a:solidFill>
@@ -10134,7 +10134,7 @@
         <p:spPr>
           <a:xfrm>
             <a:off x="640080" y="1801368"/>
-            <a:ext cx="4023360" cy="365760"/>
+            <a:ext cx="4023360" cy="623944"/>
           </a:xfrm>
           <a:prstGeom prst="rect">
             <a:avLst/>
@@ -10150,7 +10150,7 @@
               <a:buNone/>
             </a:pPr>
             <a:r>
-              <a:rPr lang="en-US" sz="1400" dirty="0">
+              <a:rPr lang="en-US" sz="1600" dirty="0">
                 <a:solidFill>
                   <a:srgbClr val="1B2533"/>
                 </a:solidFill>
@@ -10160,7 +10160,7 @@
               </a:rPr>
               <a:t>Contracted hours a week</a:t>
             </a:r>
-            <a:endParaRPr lang="en-US" sz="1400" dirty="0"/>
+            <a:endParaRPr lang="en-US" sz="1600" dirty="0"/>
           </a:p>
         </p:txBody>
       </p:sp>
@@ -10173,7 +10173,7 @@
         <p:spPr>
           <a:xfrm>
             <a:off x="4663440" y="1801368"/>
-            <a:ext cx="2011680" cy="365760"/>
+            <a:ext cx="2011680" cy="623944"/>
           </a:xfrm>
           <a:prstGeom prst="rect">
             <a:avLst/>
@@ -10189,7 +10189,7 @@
               <a:buNone/>
             </a:pPr>
             <a:r>
-              <a:rPr lang="en-US" sz="1600" dirty="0">
+              <a:rPr lang="en-US" sz="1800" dirty="0">
                 <a:solidFill>
                   <a:srgbClr val="5B6778"/>
                 </a:solidFill>
@@ -10199,7 +10199,7 @@
               </a:rPr>
               <a:t>35h</a:t>
             </a:r>
-            <a:endParaRPr lang="en-US" sz="1600" dirty="0"/>
+            <a:endParaRPr lang="en-US" sz="1800" dirty="0"/>
           </a:p>
         </p:txBody>
       </p:sp>
@@ -10212,7 +10212,7 @@
         <p:spPr>
           <a:xfrm>
             <a:off x="6675120" y="1801368"/>
-            <a:ext cx="2011680" cy="365760"/>
+            <a:ext cx="2011680" cy="623944"/>
           </a:xfrm>
           <a:prstGeom prst="rect">
             <a:avLst/>
@@ -10228,7 +10228,7 @@
               <a:buNone/>
             </a:pPr>
             <a:r>
-              <a:rPr lang="en-US" sz="1800" b="1" dirty="0">
+              <a:rPr lang="en-US" sz="2000" b="1" dirty="0">
                 <a:solidFill>
                   <a:srgbClr val="001E3C"/>
                 </a:solidFill>
@@ -10238,7 +10238,7 @@
               </a:rPr>
               <a:t>35h</a:t>
             </a:r>
-            <a:endParaRPr lang="en-US" sz="1800" dirty="0"/>
+            <a:endParaRPr lang="en-US" sz="2000" dirty="0"/>
           </a:p>
         </p:txBody>
       </p:sp>
@@ -10250,12 +10250,12 @@
         </p:nvSpPr>
         <p:spPr>
           <a:xfrm>
-            <a:off x="457200" y="2240280"/>
-            <a:ext cx="8229600" cy="365760"/>
+            <a:off x="457200" y="2550101"/>
+            <a:ext cx="8229600" cy="623944"/>
           </a:xfrm>
           <a:prstGeom prst="roundRect">
             <a:avLst>
-              <a:gd name="adj" fmla="val 11538"/>
+              <a:gd name="adj" fmla="val 6764"/>
             </a:avLst>
           </a:prstGeom>
           <a:solidFill>
@@ -10277,8 +10277,8 @@
         </p:nvSpPr>
         <p:spPr>
           <a:xfrm>
-            <a:off x="640080" y="2240280"/>
-            <a:ext cx="4023360" cy="365760"/>
+            <a:off x="640080" y="2550101"/>
+            <a:ext cx="4023360" cy="623944"/>
           </a:xfrm>
           <a:prstGeom prst="rect">
             <a:avLst/>
@@ -10294,7 +10294,7 @@
               <a:buNone/>
             </a:pPr>
             <a:r>
-              <a:rPr lang="en-US" sz="1400" dirty="0">
+              <a:rPr lang="en-US" sz="1600" dirty="0">
                 <a:solidFill>
                   <a:srgbClr val="1B2533"/>
                 </a:solidFill>
@@ -10304,7 +10304,7 @@
               </a:rPr>
               <a:t>Saturdays a year, at time and a quarter</a:t>
             </a:r>
-            <a:endParaRPr lang="en-US" sz="1400" dirty="0"/>
+            <a:endParaRPr lang="en-US" sz="1600" dirty="0"/>
           </a:p>
         </p:txBody>
       </p:sp>
@@ -10316,8 +10316,8 @@
         </p:nvSpPr>
         <p:spPr>
           <a:xfrm>
-            <a:off x="4663440" y="2240280"/>
-            <a:ext cx="2011680" cy="365760"/>
+            <a:off x="4663440" y="2550101"/>
+            <a:ext cx="2011680" cy="623944"/>
           </a:xfrm>
           <a:prstGeom prst="rect">
             <a:avLst/>
@@ -10333,7 +10333,7 @@
               <a:buNone/>
             </a:pPr>
             <a:r>
-              <a:rPr lang="en-US" sz="1600" dirty="0">
+              <a:rPr lang="en-US" sz="1800" dirty="0">
                 <a:solidFill>
                   <a:srgbClr val="5B6778"/>
                 </a:solidFill>
@@ -10343,7 +10343,7 @@
               </a:rPr>
               <a:t>26</a:t>
             </a:r>
-            <a:endParaRPr lang="en-US" sz="1600" dirty="0"/>
+            <a:endParaRPr lang="en-US" sz="1800" dirty="0"/>
           </a:p>
         </p:txBody>
       </p:sp>
@@ -10355,8 +10355,8 @@
         </p:nvSpPr>
         <p:spPr>
           <a:xfrm>
-            <a:off x="6675120" y="2240280"/>
-            <a:ext cx="2011680" cy="365760"/>
+            <a:off x="6675120" y="2550101"/>
+            <a:ext cx="2011680" cy="623944"/>
           </a:xfrm>
           <a:prstGeom prst="rect">
             <a:avLst/>
@@ -10372,7 +10372,7 @@
               <a:buNone/>
             </a:pPr>
             <a:r>
-              <a:rPr lang="en-US" sz="1800" b="1" dirty="0">
+              <a:rPr lang="en-US" sz="2000" b="1" dirty="0">
                 <a:solidFill>
                   <a:srgbClr val="001E3C"/>
                 </a:solidFill>
@@ -10382,7 +10382,7 @@
               </a:rPr>
               <a:t>28</a:t>
             </a:r>
-            <a:endParaRPr lang="en-US" sz="1800" dirty="0"/>
+            <a:endParaRPr lang="en-US" sz="2000" dirty="0"/>
           </a:p>
         </p:txBody>
       </p:sp>
@@ -10394,12 +10394,12 @@
         </p:nvSpPr>
         <p:spPr>
           <a:xfrm>
-            <a:off x="457200" y="2679192"/>
-            <a:ext cx="8229600" cy="365760"/>
+            <a:off x="457200" y="3298834"/>
+            <a:ext cx="8229600" cy="623944"/>
           </a:xfrm>
           <a:prstGeom prst="roundRect">
             <a:avLst>
-              <a:gd name="adj" fmla="val 11538"/>
+              <a:gd name="adj" fmla="val 6764"/>
             </a:avLst>
           </a:prstGeom>
           <a:solidFill>
@@ -10421,8 +10421,8 @@
         </p:nvSpPr>
         <p:spPr>
           <a:xfrm>
-            <a:off x="640080" y="2679192"/>
-            <a:ext cx="4023360" cy="365760"/>
+            <a:off x="640080" y="3298834"/>
+            <a:ext cx="4023360" cy="623944"/>
           </a:xfrm>
           <a:prstGeom prst="rect">
             <a:avLst/>
@@ -10438,7 +10438,7 @@
               <a:buNone/>
             </a:pPr>
             <a:r>
-              <a:rPr lang="en-US" sz="1400" dirty="0">
+              <a:rPr lang="en-US" sz="1600" dirty="0">
                 <a:solidFill>
                   <a:srgbClr val="1B2533"/>
                 </a:solidFill>
@@ -10448,7 +10448,7 @@
               </a:rPr>
               <a:t>Sunday overtime to share — each, a year</a:t>
             </a:r>
-            <a:endParaRPr lang="en-US" sz="1400" dirty="0"/>
+            <a:endParaRPr lang="en-US" sz="1600" dirty="0"/>
           </a:p>
         </p:txBody>
       </p:sp>
@@ -10460,8 +10460,8 @@
         </p:nvSpPr>
         <p:spPr>
           <a:xfrm>
-            <a:off x="4663440" y="2679192"/>
-            <a:ext cx="2011680" cy="365760"/>
+            <a:off x="4663440" y="3298834"/>
+            <a:ext cx="2011680" cy="623944"/>
           </a:xfrm>
           <a:prstGeom prst="rect">
             <a:avLst/>
@@ -10477,7 +10477,7 @@
               <a:buNone/>
             </a:pPr>
             <a:r>
-              <a:rPr lang="en-US" sz="1600" dirty="0">
+              <a:rPr lang="en-US" sz="1800" dirty="0">
                 <a:solidFill>
                   <a:srgbClr val="5B6778"/>
                 </a:solidFill>
@@ -10487,7 +10487,7 @@
               </a:rPr>
               <a:t>21</a:t>
             </a:r>
-            <a:endParaRPr lang="en-US" sz="1600" dirty="0"/>
+            <a:endParaRPr lang="en-US" sz="1800" dirty="0"/>
           </a:p>
         </p:txBody>
       </p:sp>
@@ -10499,8 +10499,8 @@
         </p:nvSpPr>
         <p:spPr>
           <a:xfrm>
-            <a:off x="6675120" y="2679192"/>
-            <a:ext cx="2011680" cy="365760"/>
+            <a:off x="6675120" y="3298834"/>
+            <a:ext cx="2011680" cy="623944"/>
           </a:xfrm>
           <a:prstGeom prst="rect">
             <a:avLst/>
@@ -10516,7 +10516,7 @@
               <a:buNone/>
             </a:pPr>
             <a:r>
-              <a:rPr lang="en-US" sz="1800" b="1" dirty="0">
+              <a:rPr lang="en-US" sz="2000" b="1" dirty="0">
                 <a:solidFill>
                   <a:srgbClr val="001E3C"/>
                 </a:solidFill>
@@ -10526,7 +10526,7 @@
               </a:rPr>
               <a:t>20</a:t>
             </a:r>
-            <a:endParaRPr lang="en-US" sz="1800" dirty="0"/>
+            <a:endParaRPr lang="en-US" sz="2000" dirty="0"/>
           </a:p>
         </p:txBody>
       </p:sp>
@@ -11845,11 +11845,11 @@
         <p:spPr>
           <a:xfrm>
             <a:off x="457200" y="1801368"/>
-            <a:ext cx="8229600" cy="365760"/>
+            <a:ext cx="8229600" cy="461176"/>
           </a:xfrm>
           <a:prstGeom prst="roundRect">
             <a:avLst>
-              <a:gd name="adj" fmla="val 11538"/>
+              <a:gd name="adj" fmla="val 9151"/>
             </a:avLst>
           </a:prstGeom>
           <a:solidFill>
@@ -11872,7 +11872,7 @@
         <p:spPr>
           <a:xfrm>
             <a:off x="640080" y="1801368"/>
-            <a:ext cx="4023360" cy="365760"/>
+            <a:ext cx="4023360" cy="461176"/>
           </a:xfrm>
           <a:prstGeom prst="rect">
             <a:avLst/>
@@ -11911,7 +11911,7 @@
         <p:spPr>
           <a:xfrm>
             <a:off x="4663440" y="1801368"/>
-            <a:ext cx="2011680" cy="365760"/>
+            <a:ext cx="2011680" cy="461176"/>
           </a:xfrm>
           <a:prstGeom prst="rect">
             <a:avLst/>
@@ -11950,7 +11950,7 @@
         <p:spPr>
           <a:xfrm>
             <a:off x="6675120" y="1801368"/>
-            <a:ext cx="2011680" cy="365760"/>
+            <a:ext cx="2011680" cy="461176"/>
           </a:xfrm>
           <a:prstGeom prst="rect">
             <a:avLst/>
@@ -11988,12 +11988,12 @@
         </p:nvSpPr>
         <p:spPr>
           <a:xfrm>
-            <a:off x="457200" y="2240280"/>
-            <a:ext cx="8229600" cy="365760"/>
+            <a:off x="457200" y="2354779"/>
+            <a:ext cx="8229600" cy="461176"/>
           </a:xfrm>
           <a:prstGeom prst="roundRect">
             <a:avLst>
-              <a:gd name="adj" fmla="val 11538"/>
+              <a:gd name="adj" fmla="val 9151"/>
             </a:avLst>
           </a:prstGeom>
           <a:solidFill>
@@ -12015,8 +12015,8 @@
         </p:nvSpPr>
         <p:spPr>
           <a:xfrm>
-            <a:off x="640080" y="2240280"/>
-            <a:ext cx="4023360" cy="365760"/>
+            <a:off x="640080" y="2354779"/>
+            <a:ext cx="4023360" cy="461176"/>
           </a:xfrm>
           <a:prstGeom prst="rect">
             <a:avLst/>
@@ -12054,8 +12054,8 @@
         </p:nvSpPr>
         <p:spPr>
           <a:xfrm>
-            <a:off x="4663440" y="2240280"/>
-            <a:ext cx="2011680" cy="365760"/>
+            <a:off x="4663440" y="2354779"/>
+            <a:ext cx="2011680" cy="461176"/>
           </a:xfrm>
           <a:prstGeom prst="rect">
             <a:avLst/>
@@ -12093,8 +12093,8 @@
         </p:nvSpPr>
         <p:spPr>
           <a:xfrm>
-            <a:off x="6675120" y="2240280"/>
-            <a:ext cx="2011680" cy="365760"/>
+            <a:off x="6675120" y="2354779"/>
+            <a:ext cx="2011680" cy="461176"/>
           </a:xfrm>
           <a:prstGeom prst="rect">
             <a:avLst/>
@@ -12132,12 +12132,12 @@
         </p:nvSpPr>
         <p:spPr>
           <a:xfrm>
-            <a:off x="457200" y="2679192"/>
-            <a:ext cx="8229600" cy="365760"/>
+            <a:off x="457200" y="2908190"/>
+            <a:ext cx="8229600" cy="461176"/>
           </a:xfrm>
           <a:prstGeom prst="roundRect">
             <a:avLst>
-              <a:gd name="adj" fmla="val 11538"/>
+              <a:gd name="adj" fmla="val 9151"/>
             </a:avLst>
           </a:prstGeom>
           <a:solidFill>
@@ -12159,8 +12159,8 @@
         </p:nvSpPr>
         <p:spPr>
           <a:xfrm>
-            <a:off x="640080" y="2679192"/>
-            <a:ext cx="4023360" cy="365760"/>
+            <a:off x="640080" y="2908190"/>
+            <a:ext cx="4023360" cy="461176"/>
           </a:xfrm>
           <a:prstGeom prst="rect">
             <a:avLst/>
@@ -12198,8 +12198,8 @@
         </p:nvSpPr>
         <p:spPr>
           <a:xfrm>
-            <a:off x="4663440" y="2679192"/>
-            <a:ext cx="2011680" cy="365760"/>
+            <a:off x="4663440" y="2908190"/>
+            <a:ext cx="2011680" cy="461176"/>
           </a:xfrm>
           <a:prstGeom prst="rect">
             <a:avLst/>
@@ -12237,8 +12237,8 @@
         </p:nvSpPr>
         <p:spPr>
           <a:xfrm>
-            <a:off x="6675120" y="2679192"/>
-            <a:ext cx="2011680" cy="365760"/>
+            <a:off x="6675120" y="2908190"/>
+            <a:ext cx="2011680" cy="461176"/>
           </a:xfrm>
           <a:prstGeom prst="rect">
             <a:avLst/>
@@ -12276,12 +12276,12 @@
         </p:nvSpPr>
         <p:spPr>
           <a:xfrm>
-            <a:off x="457200" y="3118104"/>
-            <a:ext cx="8229600" cy="365760"/>
+            <a:off x="457200" y="3461601"/>
+            <a:ext cx="8229600" cy="461176"/>
           </a:xfrm>
           <a:prstGeom prst="roundRect">
             <a:avLst>
-              <a:gd name="adj" fmla="val 11538"/>
+              <a:gd name="adj" fmla="val 9151"/>
             </a:avLst>
           </a:prstGeom>
           <a:solidFill>
@@ -12303,8 +12303,8 @@
         </p:nvSpPr>
         <p:spPr>
           <a:xfrm>
-            <a:off x="640080" y="3118104"/>
-            <a:ext cx="4023360" cy="365760"/>
+            <a:off x="640080" y="3461601"/>
+            <a:ext cx="4023360" cy="461176"/>
           </a:xfrm>
           <a:prstGeom prst="rect">
             <a:avLst/>
@@ -12342,8 +12342,8 @@
         </p:nvSpPr>
         <p:spPr>
           <a:xfrm>
-            <a:off x="4663440" y="3118104"/>
-            <a:ext cx="2011680" cy="365760"/>
+            <a:off x="4663440" y="3461601"/>
+            <a:ext cx="2011680" cy="461176"/>
           </a:xfrm>
           <a:prstGeom prst="rect">
             <a:avLst/>
@@ -12381,8 +12381,8 @@
         </p:nvSpPr>
         <p:spPr>
           <a:xfrm>
-            <a:off x="6675120" y="3118104"/>
-            <a:ext cx="2011680" cy="365760"/>
+            <a:off x="6675120" y="3461601"/>
+            <a:ext cx="2011680" cy="461176"/>
           </a:xfrm>
           <a:prstGeom prst="rect">
             <a:avLst/>

--- a/docs/links-26/presentations/In-Step-for-colleagues.pptx
+++ b/docs/links-26/presentations/In-Step-for-colleagues.pptx
@@ -604,7 +604,7 @@
           <a:p>
             <a:r>
               <a:rPr lang="en-US" dirty="0"/>
-              <a:t>Read the strip left to right; week 27 is week 1 again. A cover week has no fixed shifts of its own — its four duties are placed later to cover leave and sickness, which is why it is drawn empty. Earlies here means a start before 11:00. A weekday has 7 earlies and 8 lates; a Saturday 7 and 7; a Sunday 5 and 5. Sundays stay overtime, 20 a year each (today 21), and still finish at 23:25. Who starts on which week is decided after the link is chosen. A block is weeks in a row all on earlies or all on lates. On the fixed rota the longest is 5 weeks (today 2); because a cover week’s duties are placed later, a block can run to 7 if the cover weeks beside it are given the same kind (today 3). Fewer switches between earlies and lates, but someone who prefers one kind waits longer for it to come round.</a:t>
+              <a:t>Read the strip left to right; week 27 is week 1 again. A cover week has no fixed shifts of its own — its four duties are placed later to cover leave and sickness, which is why it is drawn empty. Earlies here means a start before 11:00. A weekday has 7 earlies and 8 lates; a Saturday 7 and 7; a Sunday 5 and 5. Sundays stay overtime, 20 a year each (today 21), and still finish at 23:25. Who starts on which week is decided after the link is chosen. A block is weeks in a row all on earlies or all on lates. On the fixed rota the longest is 5 weeks (today 2); because a cover week’s duties are placed later, a block can run to 7 if the cover weeks beside it are given the same kind (today 3). Fewer switches between earlies and lates, but someone who prefers one kind waits longer for it to come round. A longer green bar is two full weekends one after the other, so the 7 weekends show as fewer bars than that.</a:t>
             </a:r>
             <a:endParaRPr lang="en-US" dirty="0"/>
           </a:p>
@@ -692,7 +692,7 @@
           <a:p>
             <a:r>
               <a:rPr lang="en-US" dirty="0"/>
-              <a:t>Leave is only needed on working days Monday to Saturday; rest days and Sundays cost nothing. Today there is one unusual stretch of the roster where 14 days buys 30 days off — In Step spreads rest days more evenly, so its best is 28. On average it is the same, 23.4 days, and at its worst it is a day better than today. Four full weeks off (Sunday to Saturday) takes at least 15 days of leave, instead of 14 at best today. Say the four-weeks figure plainly: all three shortlisted links are worse than today here (Long Break, the leave-first design in the pack, keeps the 14), and people plan a year around it. The averages depend on where you count a booking as starting, so quote those as “about the same”.</a:t>
+              <a:t>Leave is only needed on working days Monday to Saturday; rest days and Sundays cost nothing. Today there is one unusual stretch of the roster where 14 days buys 30 days off — In Step spreads rest days more evenly, so its best is 28. On average it is the same, 23.4 days, and at its worst it is a day better than today. Four full weeks off (Sunday to Saturday) takes at least 15 days of leave, instead of 14 at best today. Say the four-weeks figure plainly: all three shortlisted links are worse than today here (one design in the pack keeps the 14, at other costs), and people plan a year around it. The averages depend on where you count a booking as starting, so quote those as “about the same”.</a:t>
             </a:r>
             <a:endParaRPr lang="en-US" dirty="0"/>
           </a:p>
@@ -780,7 +780,7 @@
           <a:p>
             <a:r>
               <a:rPr lang="en-US" dirty="0"/>
-              <a:t>The Office of Rail and Road and the rail industry publish lists of rota patterns that tend to tire people. Today’s link shows four of them in the fixed rota (up to five where a cover week falls badly); In Step shows none. Two more — early starts and a weekly rotation — come with every weekly link at a 06:20 station, so they are listed on the sheet for information but not counted against any design. The “up to 1” beside the fatigue warnings is a 55-hour week. If a cover week’s four duties come straight after a busy week, and its Sunday is worked as overtime too, those seven days can come to 56.3 hours, which the rail industry’s guidance flags. Where the four fall, and whether the Sunday is worked, is for the roster office.</a:t>
+              <a:t>The Office of Rail and Road and the rail industry publish lists of rota patterns that tend to tire people. Today’s link shows four of them in the fixed rota (up to five where a cover week falls badly); In Step shows none. Two more — early starts and a weekly rotation — come with every weekly link at a 06:20 station, so they are listed on the sheet for information but not counted against any design. The “up to 1” beside the fatigue warnings is a 55-hour week. If a cover week’s four duties come straight after a busy week, and its Sunday is worked as overtime too, those seven days can come to 56.3 hours with 8-hour duties, and more with longer ones, which the rail industry’s guidance flags. Where the four fall, and whether the Sunday is worked, is for the roster office.</a:t>
             </a:r>
             <a:endParaRPr lang="en-US" dirty="0"/>
           </a:p>
@@ -868,7 +868,7 @@
           <a:p>
             <a:r>
               <a:rPr lang="en-US" dirty="0"/>
-              <a:t>Saying the downsides out loud is what makes the rest believable. None of these is hidden on the full proposal sheet either.</a:t>
+              <a:t>Saying the downsides out loud is what makes the rest believable. Every one is on the proposal sheet or the shortlist sheet as well, and slide 7 has the late finishes in full.</a:t>
             </a:r>
             <a:endParaRPr lang="en-US" dirty="0"/>
           </a:p>
@@ -1572,7 +1572,7 @@
           <a:p>
             <a:r>
               <a:rPr lang="en-US" dirty="0"/>
-              <a:t>Be straight about this one. About three more a year each finish at 23:00 or later, and all of that comes from the December rules: three on duty to the close every day, where today has two Monday to Saturday. With In Step the only people who finish after 23:00 are those three closers, so no link that meets the rules on 26 weeks can have fewer. Finishes at 22:00 or later go up more, from 78 to 94 a year: the rules also want five still on duty after 22:00, and two weekday lates finish at 22:30 with the ticket office. Early 06:20 starts hardly change. And because the shortest gap between two shifts is 14h 35m, nobody finishes late and starts early the next morning. The yearly figures are the fixed rota’s, which everyone works through twice a year; a cover week’s duties are not known yet and are left out.</a:t>
+              <a:t>Be straight about this one. About three more a year each finish at 23:00 or later, and all of that comes from the December rules: three on duty to the close every day, where today has two Monday to Saturday. With In Step the only people who finish after 23:00 are those three closers, so no link that meets the rules on 26 weeks can have fewer. Finishes at 22:00 or later go up more, from 78 to 94 a year: the rules also want five still on duty after 22:00, and two weekday lates finish at 22:30 with the ticket office. Early 06:20 starts hardly change. And because the shortest gap between two shifts is 14h 35m, nobody on the fixed rota finishes late and starts early the next morning. The yearly figures are the fixed rota’s, which everyone works through twice a year; a cover week’s duties are not known yet and are left out.</a:t>
             </a:r>
             <a:endParaRPr lang="en-US" dirty="0"/>
           </a:p>
@@ -1748,7 +1748,7 @@
           <a:p>
             <a:r>
               <a:rPr lang="en-US" dirty="0"/>
-              <a:t>A full weekend is Saturday and the following Sunday both off. Today that is 4 weekends in a 20-week cycle; In Step gives 7 in 26, and they are never more than five weeks apart, against seven today. Five is as close as they can be: a full weekend cannot start in a cover week or the week before one, so only 16 of the 26 weeks can begin one. Nobody works more than five days in a row on the fixed rota — today it is seven — and seven is the most a badly placed cover week can make it, with its Sunday worked as overtime. Every working week is all earlies or all lates — today seven weeks in 16 mix the two — and 18 of the 21 keep the same shift time Monday to Friday. Rest days mostly come in pairs: 22 of the 26 rest-day breaks are two days or more, against 13 of 17 today, and single rest days stay at four, as today. There are no six-day weeks (today there is one).</a:t>
+              <a:t>A full weekend is Saturday and the following Sunday both off. Today that is 4 weekends in a 20-week cycle; In Step gives 7 in 26, and they are never more than five weeks apart, against seven today. Five is as close as they can be: a cover week’s days are placed later, so a full weekend is not counted in a cover week or the week before one, so only 16 of the 26 weeks can begin one. Nobody works more than five days in a row on the fixed rota — today it is seven — and seven is the most a badly placed cover week can make it, with its Sunday worked as overtime. Every working week is all earlies or all lates — today seven weeks in 16 mix the two — and 18 of the 21 keep the same shift time Monday to Friday. Rest days mostly come in pairs: 22 of the 26 rest-day breaks are two days or more, against 13 of 17 today, and single rest days stay at four, as today. There are no six-day weeks (today there is one).</a:t>
             </a:r>
             <a:endParaRPr lang="en-US" dirty="0"/>
           </a:p>
@@ -4539,7 +4539,7 @@
                 <a:ea typeface="Inter" pitchFamily="34" charset="-122"/>
                 <a:cs typeface="Inter" pitchFamily="34" charset="-120"/>
               </a:rPr>
-              <a:t>Shifts about 2 minutes longer on average</a:t>
+              <a:t>Earlies or lates in longer runs</a:t>
             </a:r>
             <a:endParaRPr lang="en-US" sz="1400" dirty="0"/>
           </a:p>
@@ -4578,7 +4578,7 @@
                 <a:ea typeface="Inter" pitchFamily="34" charset="-122"/>
                 <a:cs typeface="Inter" pitchFamily="34" charset="-120"/>
               </a:rPr>
-              <a:t>That is what keeps days at work to 219 a year or fewer on the same 35 hours.</a:t>
+              <a:t>Up to 5 weeks of one kind, 7 if the cover weeks go the same way (today 2, up to 3).</a:t>
             </a:r>
             <a:endParaRPr lang="en-US" sz="1250" dirty="0"/>
           </a:p>
@@ -4854,7 +4854,7 @@
                 <a:ea typeface="Inter" pitchFamily="34" charset="-122"/>
                 <a:cs typeface="Inter" pitchFamily="34" charset="-120"/>
               </a:rPr>
-              <a:t>A few more late finishes</a:t>
+              <a:t>More late finishes</a:t>
             </a:r>
             <a:endParaRPr lang="en-US" sz="1400" dirty="0"/>
           </a:p>
@@ -4893,7 +4893,7 @@
                 <a:ea typeface="Inter" pitchFamily="34" charset="-122"/>
                 <a:cs typeface="Inter" pitchFamily="34" charset="-120"/>
               </a:rPr>
-              <a:t>42 a year each at 23:00 or later (today 39) — the rules’ minimum.</a:t>
+              <a:t>42 a year each at 23:00 or later (today 39), and 94 at 22:00 or later (today 78).</a:t>
             </a:r>
             <a:endParaRPr lang="en-US" sz="1250" dirty="0"/>
           </a:p>
@@ -4959,7 +4959,7 @@
                 <a:ea typeface="Inter" pitchFamily="34" charset="-122"/>
                 <a:cs typeface="Inter" pitchFamily="34" charset="-120"/>
               </a:rPr>
-              <a:t>Still a proposal</a:t>
+              <a:t>Fewer early finishes</a:t>
             </a:r>
             <a:endParaRPr lang="en-US" sz="1400" dirty="0"/>
           </a:p>
@@ -4998,7 +4998,7 @@
                 <a:ea typeface="Inter" pitchFamily="34" charset="-122"/>
                 <a:cs typeface="Inter" pitchFamily="34" charset="-120"/>
               </a:rPr>
-              <a:t>Your views count before a link is chosen, and who goes on which line is not decided.</a:t>
+              <a:t>12 a year each finish before 14:00 (today 26).</a:t>
             </a:r>
             <a:endParaRPr lang="en-US" sz="1250" dirty="0"/>
           </a:p>
@@ -5063,7 +5063,7 @@
                 <a:ea typeface="Inter" pitchFamily="34" charset="-122"/>
                 <a:cs typeface="Inter" pitchFamily="34" charset="-120"/>
               </a:rPr>
-              <a:t>None of these is hidden: each one is on the full proposal sheet too.</a:t>
+              <a:t>None of these is hidden: every figure here is worked out from the rota.</a:t>
             </a:r>
           </a:p>
         </p:txBody>
@@ -7453,7 +7453,7 @@
                 <a:ea typeface="Inter" pitchFamily="34" charset="-122"/>
                 <a:cs typeface="Inter" pitchFamily="34" charset="-120"/>
               </a:rPr>
-              <a:t>In Step · IS-26-T4 · every figure worked out from the rota by the Marylebone Roster app</a:t>
+              <a:t>In Step · IS-26-T4 · every figure worked out from the rota by the Marylebone Roster app and its tooling</a:t>
             </a:r>
             <a:endParaRPr lang="en-US" sz="1200" dirty="0"/>
           </a:p>
@@ -7879,7 +7879,7 @@
                 <a:ea typeface="Inter" pitchFamily="34" charset="-122"/>
                 <a:cs typeface="Inter" pitchFamily="34" charset="-120"/>
               </a:rPr>
-              <a:t>up to 7 · today 7</a:t>
+              <a:t>up to 7 · today 7–9</a:t>
             </a:r>
             <a:endParaRPr lang="en-US" sz="1200" dirty="0"/>
           </a:p>
@@ -9865,7 +9865,7 @@
                 <a:ea typeface="Inter" pitchFamily="34" charset="-122"/>
                 <a:cs typeface="Inter" pitchFamily="34" charset="-120"/>
               </a:rPr>
-              <a:t>No. The same 35-hour week on average and no more days; weeks run from 25h 30m to 41h 05m (today 25h 10m to 43h 50m), and two more of the days fall on a Saturday.</a:t>
+              <a:t>No. The same 35-hour week on average; weeks run 25h 30m–41h 05m Monday to Saturday (today 25h 10m–43h 50m), and two more days a year are Saturdays.</a:t>
             </a:r>
             <a:endParaRPr lang="en-US" sz="1400" dirty="0"/>
           </a:p>
@@ -11752,7 +11752,7 @@
                 <a:ea typeface="Inter" pitchFamily="34" charset="-122"/>
                 <a:cs typeface="Inter" pitchFamily="34" charset="-120"/>
               </a:rPr>
-              <a:t>3 more a year after 23:00 (42, today 39); 16 more at 22:00 or later (94, today 78)</a:t>
+              <a:t>3 more a year at 23:00 or later (42, today 39); 16 more at 22:00 or later (94, today 78)</a:t>
             </a:r>
             <a:endParaRPr lang="en-US" sz="1500" dirty="0"/>
           </a:p>
@@ -12472,7 +12472,7 @@
                 <a:ea typeface="Inter" pitchFamily="34" charset="-122"/>
                 <a:cs typeface="Inter" pitchFamily="34" charset="-120"/>
               </a:rPr>
-              <a:t>More people stay on after 22:00 under the December staffing; the three more after 23:00 are the fewest the rules allow.</a:t>
+              <a:t>More people stay on after 22:00 under the December staffing; the three more at 23:00 or later are the fewest the rules allow.</a:t>
             </a:r>
             <a:endParaRPr lang="en-US" sz="1400" dirty="0"/>
           </a:p>

--- a/docs/links-26/presentations/In-Step-for-colleagues.pptx
+++ b/docs/links-26/presentations/In-Step-for-colleagues.pptx
@@ -11603,7 +11603,7 @@
                 <a:ea typeface="Inter" pitchFamily="34" charset="-122"/>
                 <a:cs typeface="Inter" pitchFamily="34" charset="-120"/>
               </a:rPr>
-              <a:t>Every closing shift is 30 to 60 minutes shorter; the longest early turn goes from 8h 30m to 9h 00m, and nothing runs over 9 hours.</a:t>
+              <a:t>Every closing shift is 30 to 60 minutes shorter; the longest early Monday to Saturday goes from 8h 30m to 8h 55m, and nothing runs over 9 hours.</a:t>
             </a:r>
             <a:endParaRPr lang="en-US" sz="1400" dirty="0"/>
           </a:p>

--- a/docs/links-26/presentations/In-Step-for-colleagues.pptx
+++ b/docs/links-26/presentations/In-Step-for-colleagues.pptx
@@ -604,7 +604,7 @@
           <a:p>
             <a:r>
               <a:rPr lang="en-US" dirty="0"/>
-              <a:t>Read the strip left to right; week 27 is week 1 again. A cover week has no fixed shifts of its own — its four duties are placed later to cover leave and sickness, which is why it is drawn empty. Earlies here means a start before 11:00. A weekday has 7 earlies and 8 lates; a Saturday 7 and 7; a Sunday 5 and 5. Sundays stay overtime, 20 a year each (today 21), and still finish at 23:25. Who starts on which week is decided after the link is chosen. A block is weeks in a row all on earlies or all on lates. On the fixed rota the longest is 5 weeks (today 2); because a cover week’s duties are placed later, a block can run to 7 if the cover weeks beside it are given the same kind (today 3). Fewer switches between earlies and lates, but someone who prefers one kind waits longer for it to come round. A longer green bar is two full weekends one after the other, so the 7 weekends show as fewer bars than that.</a:t>
+              <a:t>Read the strip left to right; week 27 is week 1 again. A cover week has no fixed shifts of its own — its four duties are placed later to cover leave and sickness, which is why it is drawn empty. Earlies here means a start before 11:00. A weekday has 7 earlies and 8 lates; a Saturday 7 and 7; a Sunday 5 and 5. Sundays stay overtime, 20 a year each (today 21), and still finish at 23:25. Who starts on which week is decided after the link is chosen. A block is weeks in a row all on earlies or all on lates. On the fixed rota the longest is 5 weeks (today 2); because a cover week’s duties are placed later, a block can run to 7 if the cover weeks beside it are given the same kind (today 3). Fewer switches between earlies and lates, but someone who prefers one kind waits longer for it to come round.</a:t>
             </a:r>
             <a:endParaRPr lang="en-US" dirty="0"/>
           </a:p>
@@ -1132,7 +1132,7 @@
           <a:p>
             <a:r>
               <a:rPr lang="en-US" dirty="0"/>
-              <a:t>This is the whole pitch on one slide. Same 35-hour week as now. Never more than five days in a row on the fixed rota — seven at most when a cover week falls badly and its Sunday is worked as overtime, where today it is seven and can reach nine. Seven full weekends off in every 26 weeks, against four in 20 today, and never more than five weeks apart — though each person works about two more Saturdays a year. Every working week is all earlies or all lates, and 18 of the 21 working weeks keep one shift time Monday to Friday. Nine of the fifteen shift times are ones people already work, today’s 13:45 finish among them. And every closing shift is shorter: the weekday closer by 30 minutes, the Saturday closer by an hour and the Sunday closer by 45 minutes. Say the leave cost here too, before anyone asks: four full weeks off, Sunday to Saturday, takes 15 days’ leave rather than 14, and the best 14-day stretch is 28 days off rather than 30; the average is the same and the worst a day better. A cover week is one of the five weeks in 26 with no fixed shifts: its four duties are placed later to cover leave and sickness; the fixed rota is the other 21 weeks, whose shifts are set.</a:t>
+              <a:t>This is the whole pitch on one slide. Same 35-hour week as now. Never more than five days in a row on the fixed rota — seven at most when a cover week falls badly and its Sunday is worked as overtime, where today it is seven and can reach nine. Seven full weekends off in every 26 weeks, against four in 20 today, and never more than five weeks apart — though each person works about two more Saturdays a year. Every working week is all earlies or all lates, and 18 of the 21 working weeks keep one shift time Monday to Friday. Nine of the fifteen shift times are ones people already work, today’s 13:45 finish among them. And every closing shift is shorter: the weekday closer by 30 minutes, the Saturday closer by an hour and the Sunday closer by 45 minutes. Say the leave cost here too, before anyone asks: four full weeks off in a row, Sunday to Saturday, takes 15 days’ leave rather than 14, and the best 14-day stretch is 28 days off rather than 30; the average is the same and the worst a day better. A cover week is one of the five weeks in 26 with no fixed shifts: its four duties are placed later to cover leave and sickness; the fixed rota is the other 21 weeks, whose shifts are set.</a:t>
             </a:r>
             <a:endParaRPr lang="en-US" dirty="0"/>
           </a:p>
@@ -1220,7 +1220,7 @@
           <a:p>
             <a:r>
               <a:rPr lang="en-US" dirty="0"/>
-              <a:t>The change is coming whatever we do: the December 2026 timetable and the new staffing levels mean the link has to be redrawn. The question is which version we want. The staffing levels and the Sunday cover were confirmed verbally on 29 September 2026; with the ticket office’s pairs and the cap on shift times they are the nine December rules every proposal is scored on. The 26-week link, its five cover weeks and the ceiling of 219 contracted days a year were set on 1 October 2026. Fourteen on a Saturday is one of three flexible aims, worked towards but not scored.</a:t>
+              <a:t>The change is coming whatever we do: the December 2026 timetable and the new staffing levels mean the link has to be redrawn. The question is which version we want. The staffing levels and the Sunday cover were confirmed verbally on 29 September 2026; with the ticket office’s pairs, the handovers, Sunday duties of 8 to 9 hours and the cap on shift times they are the nine December rules every proposal is scored on. The 26-week link, its five cover weeks and the ceiling of 219 contracted days a year were set on 1 October 2026. Fourteen on a Saturday is one of three flexible aims, worked towards but not scored.</a:t>
             </a:r>
             <a:endParaRPr lang="en-US" dirty="0"/>
           </a:p>
@@ -1396,7 +1396,7 @@
           <a:p>
             <a:r>
               <a:rPr lang="en-US" dirty="0"/>
-              <a:t>Basic pay follows the 35-hour week, which does not change; overtime and premium duties vary person to person. The Saturday and Sunday counts are the link’s fixed duties and leave out anything later given in a cover week. Saturdays in the contract are paid at time and a quarter, and on average a person is rostered about 28 a year instead of 26. Sundays stay overtime: 10 a week shared among 26 people instead of 8 among 20, so about the same each (20 a year, against 21). On this link they are everyone’s figures, whichever line you start on: a year is exactly two turns of the 26 weeks, so everyone works each week twice — today’s, on 20 weeks, are averages. They are not a payslip; the Pay Calculator in the app does that.</a:t>
+              <a:t>Basic pay follows the 35-hour week, which does not change. What moves is the premium pay. Saturdays in the contract are paid at time and a quarter, and each person is rostered about 28 a year instead of 26 — about 14 more Saturday hours a year, worth 3.6 hours’ pay. Sundays stay overtime, paid at time and a half: 10 a week shared among 26 people instead of 8 among 20, so about 20 each a year against 21, and a little shorter — about 167 Sunday hours a year each against 177, worth 15.7 hours’ pay less. Together, someone who works their full share of Sundays is 12.1 hours’ pay a year worse off, roughly £250 at the CEA rate of £21.49; someone who works no Sunday overtime is 3.6 hours’ pay better off. The Saturday and Sunday counts are the link’s fixed duties and leave out anything later given in a cover week. The rostered Saturdays are everyone’s, whichever line you start on: a year is exactly two turns of the 26 weeks, so everyone works each week twice — today’s, on 20 weeks, are averages. How much Sunday overtime each person works is up to them, as now. None of this is a payslip; the Pay Calculator in the app does that.</a:t>
             </a:r>
             <a:endParaRPr lang="en-US" dirty="0"/>
           </a:p>
@@ -1660,7 +1660,7 @@
           <a:p>
             <a:r>
               <a:rPr lang="en-US" dirty="0"/>
-              <a:t>In Step was built keeping the times people already work wherever that cost little. Nine of its fifteen are worked today, and it uses fewer different times overall than today’s eighteen. Today’s 06:20–13:45 stays on every weekday, and today’s 06:20–13:35 moves to a Saturday. Three of the new times are shorter versions of today’s lates: the weekday and Saturday closers start at 15:45 and the Sunday closer at 15:15, and the Sunday office late finishes at 22:30, not 23:25 — the same 14:30–22:30 is a new weekday late too, ending with the ticket office. Two new weekday earlies, 06:20–15:15 and 07:00–15:45, are longer than any early worked today, and the Sunday 09:00–18:00 is new. The full list is on the slide. The Sunday opener stays today’s 07:15–15:45.</a:t>
+              <a:t>In Step was built keeping the times people already work wherever that cost little. Nine of its fifteen are worked today, and it uses fewer different times overall than today’s eighteen. Today’s 06:20–13:45 stays on every weekday. Three of the new times are shorter versions of today’s lates: the weekday and Saturday closers start at 15:45 and the Sunday closer at 15:15, and the Sunday office late finishes at 22:30, not 23:25 — the same 14:30–22:30 is a new weekday late too, ending with the ticket office. Two new weekday earlies, 06:20–15:15 and 07:00–15:45, are longer than any early worked today, and the Sunday 09:00–18:00 is new. Some known times move day: the Saturday’s 06:20–13:35, 06:20–14:20, 08:00–16:30 and 14:00–22:30 are worked today only on weekdays, and the weekday 12:00–20:00 only on a Saturday. The full list is on the slide. The Sunday opener stays today’s 07:15–15:45.</a:t>
             </a:r>
             <a:endParaRPr lang="en-US" dirty="0"/>
           </a:p>
@@ -1748,7 +1748,7 @@
           <a:p>
             <a:r>
               <a:rPr lang="en-US" dirty="0"/>
-              <a:t>A full weekend is Saturday and the following Sunday both off. Today that is 4 weekends in a 20-week cycle; In Step gives 7 in 26, and they are never more than five weeks apart, against seven today. Five is as close as they can be: a cover week’s days are placed later, so a full weekend is not counted in a cover week or the week before one, so only 16 of the 26 weeks can begin one. Nobody works more than five days in a row on the fixed rota — today it is seven — and seven is the most a badly placed cover week can make it, with its Sunday worked as overtime. Every working week is all earlies or all lates — today seven weeks in 16 mix the two — and 18 of the 21 keep the same shift time Monday to Friday. Rest days mostly come in pairs: 22 of the 26 rest-day breaks are two days or more, against 13 of 17 today, and single rest days stay at four, as today. There are no six-day weeks (today there is one).</a:t>
+              <a:t>A full weekend is Saturday and the following Sunday both off. Today that is 4 weekends in a 20-week cycle; In Step gives 7 in 26, and they are never more than five weeks apart, against seven today. Five is as close as they can be: a cover week’s days are placed later, so a full weekend is not counted in a cover week or the week before one, which leaves 16 of the 26 weeks able to begin one. Nobody works more than five days in a row on the fixed rota — today it is seven — and seven is the most a badly placed cover week can make it, with its Sunday worked as overtime. Every working week is all earlies or all lates — today seven weeks in 16 mix the two — and 18 of the 21 keep one shift time Monday to Friday, against 7 of 16 today. Rest days mostly come in pairs: 22 of the 26 rest-day breaks are two days and the other four single days, none longer; today 13 of 17 are two days or more, five of them three or four days (about 13 a year each). Single rest days stay at four, as today, so fewer a year each: about 8, against 10. There are no six-day weeks (today there is one).</a:t>
             </a:r>
             <a:endParaRPr lang="en-US" dirty="0"/>
           </a:p>
@@ -3350,7 +3350,7 @@
                 <a:ea typeface="Inter" pitchFamily="34" charset="-122"/>
                 <a:cs typeface="Inter" pitchFamily="34" charset="-120"/>
               </a:rPr>
-              <a:t>Best stretch 28 days, not 30; four full weeks off, Sunday to Saturday, costs 15 days’ leave, not 14. Average the same, worst a day better.</a:t>
+              <a:t>Best stretch 28 days, not 30; four full weeks off in a row, Sunday to Saturday, costs 15 days’ leave, not 14. Average the same, worst a day better.</a:t>
             </a:r>
             <a:endParaRPr lang="en-US" sz="1400" dirty="0"/>
           </a:p>
@@ -4473,7 +4473,7 @@
                 <a:ea typeface="Inter" pitchFamily="34" charset="-122"/>
                 <a:cs typeface="Inter" pitchFamily="34" charset="-120"/>
               </a:rPr>
-              <a:t>Three are shorter versions of today’s lates; two are longer weekday earlies.</a:t>
+              <a:t>Three shorter lates, two longer weekday earlies and the 9-hour Sunday early.</a:t>
             </a:r>
             <a:endParaRPr lang="en-US" sz="1250" dirty="0"/>
           </a:p>
@@ -4683,7 +4683,7 @@
                 <a:ea typeface="Inter" pitchFamily="34" charset="-122"/>
                 <a:cs typeface="Inter" pitchFamily="34" charset="-120"/>
               </a:rPr>
-              <a:t>The least leave for four complete weeks off, Sunday to Saturday.</a:t>
+              <a:t>The least leave for four complete weeks off in a row, Sunday to Saturday.</a:t>
             </a:r>
             <a:endParaRPr lang="en-US" sz="1250" dirty="0"/>
           </a:p>
@@ -10590,7 +10590,7 @@
                 <a:ea typeface="Inter" pitchFamily="34" charset="-122"/>
                 <a:cs typeface="Inter" pitchFamily="34" charset="-120"/>
               </a:rPr>
-              <a:t>No. The same 35-hour week — plus about two more Saturdays at time and a quarter.</a:t>
+              <a:t>No: the same 35 hours. Two more Saturdays at time and a quarter, less Sunday overtime: about £250 a year less if you work your share of Sundays.</a:t>
             </a:r>
             <a:endParaRPr lang="en-US" sz="1400" dirty="0"/>
           </a:p>
@@ -14248,7 +14248,7 @@
                 <a:ea typeface="Inter" pitchFamily="34" charset="-122"/>
                 <a:cs typeface="Inter" pitchFamily="34" charset="-120"/>
               </a:rPr>
-              <a:t>Weeks on one turn, no early–late switch</a:t>
+              <a:t>Weeks on one shift time, Monday to Friday</a:t>
             </a:r>
             <a:endParaRPr lang="en-US" sz="1400" dirty="0"/>
           </a:p>

--- a/docs/links-26/presentations/In-Step-for-colleagues.pptx
+++ b/docs/links-26/presentations/In-Step-for-colleagues.pptx
@@ -692,7 +692,7 @@
           <a:p>
             <a:r>
               <a:rPr lang="en-US" dirty="0"/>
-              <a:t>Leave is only needed on working days Monday to Saturday; rest days and Sundays cost nothing. Today there is one unusual stretch of the roster where 14 days buys 30 days off — In Step spreads rest days more evenly, so its best is 28. On average it is the same, 23.4 days, and at its worst it is a day better than today. Four full weeks off (Sunday to Saturday) takes at least 15 days of leave, instead of 14 at best today. Say the four-weeks figure plainly: both shortlisted links are worse than today here (Long Break, the leave-first design in the pack, keeps the 14), and people plan a year around it. The averages depend on where you count a booking as starting, so quote those as “about the same”.</a:t>
+              <a:t>Leave is only needed on working days Monday to Saturday; rest days and Sundays cost nothing. Today there is one unusual stretch of the roster where 14 days buys 30 days off — In Step spreads rest days more evenly, so its best is 28. On average it is the same, 23.4 days, and at its worst it is a day better than today. Four full weeks off (Sunday to Saturday) takes at least 15 days of leave, instead of 14 at best today. Say the four-weeks figure plainly: all three shortlisted links are worse than today here (one design in the pack keeps the 14, at other costs), and people plan a year around it. The averages depend on where you count a booking as starting, so quote those as “about the same”.</a:t>
             </a:r>
             <a:endParaRPr lang="en-US" dirty="0"/>
           </a:p>
@@ -780,7 +780,7 @@
           <a:p>
             <a:r>
               <a:rPr lang="en-US" dirty="0"/>
-              <a:t>The Office of Rail and Road and the rail industry publish lists of rota patterns that tend to tire people. Today’s link shows four of them in the fixed rota (up to five where a cover week falls badly); In Step shows none. Two more — early starts and a weekly rotation — come with every weekly link at a 06:20 station, so they are listed on the sheet for information but not counted against any design. The “up to 1” beside the fatigue warnings is a 55-hour week. If a cover week’s four duties come straight after a busy week, and its Sunday is worked as overtime too, those seven days can come to 56.3 hours, which the rail industry’s guidance flags. Where the four fall, and whether the Sunday is worked, is for the roster office.</a:t>
+              <a:t>The Office of Rail and Road and the rail industry publish lists of rota patterns that tend to tire people. Today’s link shows four of them in the fixed rota (up to five where a cover week falls badly); In Step shows none. Two more — early starts and a weekly rotation — come with every weekly link at a 06:20 station, so they are listed on the sheet for information but not counted against any design. The “up to 1” beside the fatigue warnings is a 55-hour week. If a cover week’s four duties come straight after a busy week, and its Sunday is worked as overtime too, those seven days can come to 56.3 hours with 8-hour duties, and more with longer ones, which the rail industry’s guidance flags. Where the four fall, and whether the Sunday is worked, is for the roster office.</a:t>
             </a:r>
             <a:endParaRPr lang="en-US" dirty="0"/>
           </a:p>
@@ -868,7 +868,7 @@
           <a:p>
             <a:r>
               <a:rPr lang="en-US" dirty="0"/>
-              <a:t>Saying the downsides out loud is what makes the rest believable. None of these is hidden on the full proposal sheet either.</a:t>
+              <a:t>Saying the downsides out loud is what makes the rest believable. Every one is on the proposal sheet or the shortlist sheet as well, and slide 7 has the late finishes in full.</a:t>
             </a:r>
             <a:endParaRPr lang="en-US" dirty="0"/>
           </a:p>
@@ -1132,7 +1132,7 @@
           <a:p>
             <a:r>
               <a:rPr lang="en-US" dirty="0"/>
-              <a:t>This is the whole pitch on one slide. Same 35-hour week as now. Never more than five days in a row on the fixed rota — seven at most when a cover week falls badly and its Sunday is worked as overtime, where today it is seven and can reach nine. Seven full weekends off in every 26 weeks, against four in 20 today, and never more than five weeks apart — though each person works about two more Saturdays a year. Every working week is all earlies or all lates, and 18 of the 21 working weeks keep one shift time Monday to Friday. Nine of the fifteen shift times are ones people already work, today’s 13:45 finish among them. And every closing shift is shorter: the weekday closer by 30 minutes, the Saturday closer by an hour and the Sunday closer by 45 minutes. Say the leave cost here too, before anyone asks: four full weeks off, Sunday to Saturday, takes 15 days’ leave rather than 14, and the best 14-day stretch is 28 days off rather than 30; the average is the same and the worst a day better. A cover week is one of the five weeks in 26 with no fixed shifts: its four duties are placed later to cover leave and sickness; the fixed rota is the other 21 weeks, whose shifts are set.</a:t>
+              <a:t>This is the whole pitch on one slide. Same 35-hour week as now. Never more than five days in a row on the fixed rota — seven at most when a cover week falls badly and its Sunday is worked as overtime, where today it is seven and can reach nine. Seven full weekends off in every 26 weeks, against four in 20 today, and never more than five weeks apart — though each person works about two more Saturdays a year. Every working week is all earlies or all lates, and 18 of the 21 working weeks keep one shift time Monday to Friday. Nine of the fifteen shift times are ones people already work, today’s 13:45 finish among them. And every closing shift is shorter: the weekday closer by 30 minutes, the Saturday closer by an hour and the Sunday closer by 45 minutes. Say the leave cost here too, before anyone asks: four full weeks off in a row, Sunday to Saturday, takes 15 days’ leave rather than 14, and the best 14-day stretch is 28 days off rather than 30; the average is the same and the worst a day better. A cover week is one of the five weeks in 26 with no fixed shifts: its four duties are placed later to cover leave and sickness; the fixed rota is the other 21 weeks, whose shifts are set.</a:t>
             </a:r>
             <a:endParaRPr lang="en-US" dirty="0"/>
           </a:p>
@@ -1220,7 +1220,7 @@
           <a:p>
             <a:r>
               <a:rPr lang="en-US" dirty="0"/>
-              <a:t>The change is coming whatever we do: the December 2026 timetable and the new staffing levels mean the link has to be redrawn. The question is which version we want. The staffing levels and the Sunday cover were confirmed verbally on 29 September 2026; with the ticket office’s pairs and the cap on shift times they are the nine December rules every proposal is scored on. The 26-week link, its five cover weeks and the ceiling of 219 contracted days a year were set on 1 October 2026. Fourteen on a Saturday is one of three flexible aims, worked towards but not scored.</a:t>
+              <a:t>The change is coming whatever we do: the December 2026 timetable and the new staffing levels mean the link has to be redrawn. The question is which version we want. The staffing levels and the Sunday cover were confirmed verbally on 29 September 2026; with the ticket office’s pairs, the handovers, Sunday duties of 8 to 9 hours and the cap on shift times they are the nine December rules every proposal is scored on. The 26-week link, its five cover weeks and the ceiling of 219 contracted days a year were set on 1 October 2026. Fourteen on a Saturday is one of three flexible aims, worked towards but not scored.</a:t>
             </a:r>
             <a:endParaRPr lang="en-US" dirty="0"/>
           </a:p>
@@ -1396,7 +1396,7 @@
           <a:p>
             <a:r>
               <a:rPr lang="en-US" dirty="0"/>
-              <a:t>Basic pay follows the 35-hour week, which does not change; overtime and premium duties vary person to person. The Saturday and Sunday counts are the link’s fixed duties and leave out anything later given in a cover week. Saturdays in the contract are paid at time and a quarter, and on average a person is rostered about 28 a year instead of 26. Sundays stay overtime: 10 a week shared among 26 people instead of 8 among 20, so about the same each (20 a year, against 21). On this link they are everyone’s figures, whichever line you start on: a year is exactly two turns of the 26 weeks, so everyone works each week twice — today’s, on 20 weeks, are averages. They are not a payslip; the Pay Calculator in the app does that.</a:t>
+              <a:t>Basic pay follows the 35-hour week, which does not change. What moves is the premium pay. Saturdays in the contract are paid at time and a quarter, and each person is rostered about 28 a year instead of 26 — about 14 more Saturday hours a year, worth 3.6 hours’ pay. Sundays stay overtime, paid at time and a half: 10 a week shared among 26 people instead of 8 among 20, so about 20 each a year against 21, and a little shorter — about 167 Sunday hours a year each against 177, worth 15.7 hours’ pay less. Together, someone who works their full share of Sundays is 12.1 hours’ pay a year worse off, roughly £250 at the CEA rate of £21.49; someone who works no Sunday overtime is 3.6 hours’ pay better off. The Saturday and Sunday counts are the link’s fixed duties and leave out anything later given in a cover week. The rostered Saturdays are everyone’s, whichever line you start on: a year is exactly two turns of the 26 weeks, so everyone works each week twice — today’s, on 20 weeks, are averages. How much Sunday overtime each person works is up to them, as now. None of this is a payslip; the Pay Calculator in the app does that.</a:t>
             </a:r>
             <a:endParaRPr lang="en-US" dirty="0"/>
           </a:p>
@@ -1572,7 +1572,7 @@
           <a:p>
             <a:r>
               <a:rPr lang="en-US" dirty="0"/>
-              <a:t>Be straight about this one. About three more a year each finish at 23:00 or later, and all of that comes from the December rules: three on duty to the close every day, where today has two Monday to Saturday. With In Step the only people who finish after 23:00 are those three closers, so no link that meets the rules on 26 weeks can have fewer. Finishes at 22:00 or later go up more, from 78 to 94 a year: the rules also want five still on duty after 22:00, and two weekday lates finish at 22:30 with the ticket office. Early 06:20 starts hardly change. And because the shortest gap between two shifts is 14h 35m, nobody finishes late and starts early the next morning. The yearly figures are the fixed rota’s, which everyone works through twice a year; a cover week’s duties are not known yet and are left out.</a:t>
+              <a:t>Be straight about this one. About three more a year each finish at 23:00 or later, and all of that comes from the December rules: three on duty to the close every day, where today has two Monday to Saturday. With In Step the only people who finish after 23:00 are those three closers, so no link that meets the rules on 26 weeks can have fewer. Finishes at 22:00 or later go up more, from 78 to 94 a year: the rules also want five still on duty after 22:00, and two weekday lates finish at 22:30 with the ticket office. Early 06:20 starts hardly change. And because the shortest gap between two shifts is 14h 35m, nobody on the fixed rota finishes late and starts early the next morning. The yearly figures are the fixed rota’s, which everyone works through twice a year; a cover week’s duties are not known yet and are left out.</a:t>
             </a:r>
             <a:endParaRPr lang="en-US" dirty="0"/>
           </a:p>
@@ -1660,7 +1660,7 @@
           <a:p>
             <a:r>
               <a:rPr lang="en-US" dirty="0"/>
-              <a:t>In Step was built keeping the times people already work wherever that cost little. Nine of its fifteen are worked today, and it uses fewer different times overall than today’s eighteen. Today’s 06:20–13:45 stays on every weekday, and today’s 06:20–13:35 moves to a Saturday. Three of the new times are shorter versions of today’s lates: the weekday and Saturday closers start at 15:45 and the Sunday closer at 15:15, and the Sunday office late finishes at 22:30, not 23:25 — the same 14:30–22:30 is a new weekday late too, ending with the ticket office. Two new weekday earlies, 06:20–15:15 and 07:00–15:45, are longer than any early worked today, and the Sunday 09:00–18:00 is new. The full list is on the slide. The Sunday opener stays today’s 07:15–15:45.</a:t>
+              <a:t>In Step was built keeping the times people already work wherever that cost little. Nine of its fifteen are worked today, and it uses fewer different times overall than today’s eighteen. Today’s 06:20–13:45 stays on every weekday. Three of the new times are shorter versions of today’s lates: the weekday and Saturday closers start at 15:45 and the Sunday closer at 15:15, and the Sunday office late finishes at 22:30, not 23:25 — the same 14:30–22:30 is a new weekday late too, ending with the ticket office. Two new weekday earlies, 06:20–15:15 and 07:00–15:45, are longer than any early worked today, and the Sunday 09:00–18:00 is new. Some known times move day: the Saturday’s 06:20–13:35, 06:20–14:20, 08:00–16:30 and 14:00–22:30 are worked today only on weekdays, and the weekday 12:00–20:00 only on a Saturday. The full list is on the slide. The Sunday opener stays today’s 07:15–15:45.</a:t>
             </a:r>
             <a:endParaRPr lang="en-US" dirty="0"/>
           </a:p>
@@ -1748,7 +1748,7 @@
           <a:p>
             <a:r>
               <a:rPr lang="en-US" dirty="0"/>
-              <a:t>A full weekend is Saturday and the following Sunday both off. Today that is 4 weekends in a 20-week cycle; In Step gives 7 in 26, and they are never more than five weeks apart, against seven today. Five is as close as they can be: a full weekend cannot start in a cover week or the week before one, so only 16 of the 26 weeks can begin one. Nobody works more than five days in a row on the fixed rota — today it is seven — and seven is the most a badly placed cover week can make it, with its Sunday worked as overtime. Every working week is all earlies or all lates — today seven weeks in 16 mix the two — and 18 of the 21 keep the same shift time Monday to Friday. Rest days mostly come in pairs: 22 of the 26 rest-day breaks are two days or more, against 13 of 17 today, and single rest days stay at four, as today. There are no six-day weeks (today there is one).</a:t>
+              <a:t>A full weekend is Saturday and the following Sunday both off. Today that is 4 weekends in a 20-week cycle; In Step gives 7 in 26, and they are never more than five weeks apart, against seven today. Five is as close as they can be: a cover week’s days are placed later, so a full weekend is not counted in a cover week or the week before one, which leaves 16 of the 26 weeks able to begin one. Nobody works more than five days in a row on the fixed rota — today it is seven — and seven is the most a badly placed cover week can make it, with its Sunday worked as overtime. Every working week is all earlies or all lates — today seven weeks in 16 mix the two — and 18 of the 21 keep one shift time Monday to Friday, against 7 of 16 today. Rest days mostly come in pairs: 22 of the 26 rest-day breaks are two days and the other four single days, none longer; today 13 of 17 are two days or more, five of them three or four days (about 13 a year each). Single rest days stay at four, as today, so fewer a year each: about 8, against 10. There are no six-day weeks (today there is one).</a:t>
             </a:r>
             <a:endParaRPr lang="en-US" dirty="0"/>
           </a:p>
@@ -2481,7 +2481,7 @@
                 <a:ea typeface="Inter" pitchFamily="34" charset="-122"/>
                 <a:cs typeface="Inter" pitchFamily="34" charset="-120"/>
               </a:rPr>
-              <a:t>14 full weekends off a year, at most five weeks apart; blocks of earlies or lates up to 5 weeks, 7 if the cover weeks go the same way.</a:t>
+              <a:t>Blocks of earlies or lates up to 5 weeks, 7 if the cover weeks go the same way; a full weekend off comes round at least every 5 weeks.</a:t>
             </a:r>
             <a:endParaRPr lang="en-US" sz="1400" dirty="0"/>
           </a:p>
@@ -2723,11 +2723,11 @@
         <p:spPr>
           <a:xfrm>
             <a:off x="457200" y="1801368"/>
-            <a:ext cx="8229600" cy="365760"/>
+            <a:ext cx="8229600" cy="461176"/>
           </a:xfrm>
           <a:prstGeom prst="roundRect">
             <a:avLst>
-              <a:gd name="adj" fmla="val 11538"/>
+              <a:gd name="adj" fmla="val 9151"/>
             </a:avLst>
           </a:prstGeom>
           <a:solidFill>
@@ -2750,7 +2750,7 @@
         <p:spPr>
           <a:xfrm>
             <a:off x="640080" y="1801368"/>
-            <a:ext cx="4023360" cy="365760"/>
+            <a:ext cx="4023360" cy="461176"/>
           </a:xfrm>
           <a:prstGeom prst="rect">
             <a:avLst/>
@@ -2789,7 +2789,7 @@
         <p:spPr>
           <a:xfrm>
             <a:off x="4663440" y="1801368"/>
-            <a:ext cx="2011680" cy="365760"/>
+            <a:ext cx="2011680" cy="461176"/>
           </a:xfrm>
           <a:prstGeom prst="rect">
             <a:avLst/>
@@ -2828,7 +2828,7 @@
         <p:spPr>
           <a:xfrm>
             <a:off x="6675120" y="1801368"/>
-            <a:ext cx="2011680" cy="365760"/>
+            <a:ext cx="2011680" cy="461176"/>
           </a:xfrm>
           <a:prstGeom prst="rect">
             <a:avLst/>
@@ -2866,12 +2866,12 @@
         </p:nvSpPr>
         <p:spPr>
           <a:xfrm>
-            <a:off x="457200" y="2240280"/>
-            <a:ext cx="8229600" cy="365760"/>
+            <a:off x="457200" y="2354779"/>
+            <a:ext cx="8229600" cy="461176"/>
           </a:xfrm>
           <a:prstGeom prst="roundRect">
             <a:avLst>
-              <a:gd name="adj" fmla="val 11538"/>
+              <a:gd name="adj" fmla="val 9151"/>
             </a:avLst>
           </a:prstGeom>
           <a:solidFill>
@@ -2893,8 +2893,8 @@
         </p:nvSpPr>
         <p:spPr>
           <a:xfrm>
-            <a:off x="640080" y="2240280"/>
-            <a:ext cx="4023360" cy="365760"/>
+            <a:off x="640080" y="2354779"/>
+            <a:ext cx="4023360" cy="461176"/>
           </a:xfrm>
           <a:prstGeom prst="rect">
             <a:avLst/>
@@ -2932,8 +2932,8 @@
         </p:nvSpPr>
         <p:spPr>
           <a:xfrm>
-            <a:off x="4663440" y="2240280"/>
-            <a:ext cx="2011680" cy="365760"/>
+            <a:off x="4663440" y="2354779"/>
+            <a:ext cx="2011680" cy="461176"/>
           </a:xfrm>
           <a:prstGeom prst="rect">
             <a:avLst/>
@@ -2971,8 +2971,8 @@
         </p:nvSpPr>
         <p:spPr>
           <a:xfrm>
-            <a:off x="6675120" y="2240280"/>
-            <a:ext cx="2011680" cy="365760"/>
+            <a:off x="6675120" y="2354779"/>
+            <a:ext cx="2011680" cy="461176"/>
           </a:xfrm>
           <a:prstGeom prst="rect">
             <a:avLst/>
@@ -3010,12 +3010,12 @@
         </p:nvSpPr>
         <p:spPr>
           <a:xfrm>
-            <a:off x="457200" y="2679192"/>
-            <a:ext cx="8229600" cy="365760"/>
+            <a:off x="457200" y="2908190"/>
+            <a:ext cx="8229600" cy="461176"/>
           </a:xfrm>
           <a:prstGeom prst="roundRect">
             <a:avLst>
-              <a:gd name="adj" fmla="val 11538"/>
+              <a:gd name="adj" fmla="val 9151"/>
             </a:avLst>
           </a:prstGeom>
           <a:solidFill>
@@ -3037,8 +3037,8 @@
         </p:nvSpPr>
         <p:spPr>
           <a:xfrm>
-            <a:off x="640080" y="2679192"/>
-            <a:ext cx="4023360" cy="365760"/>
+            <a:off x="640080" y="2908190"/>
+            <a:ext cx="4023360" cy="461176"/>
           </a:xfrm>
           <a:prstGeom prst="rect">
             <a:avLst/>
@@ -3076,8 +3076,8 @@
         </p:nvSpPr>
         <p:spPr>
           <a:xfrm>
-            <a:off x="4663440" y="2679192"/>
-            <a:ext cx="2011680" cy="365760"/>
+            <a:off x="4663440" y="2908190"/>
+            <a:ext cx="2011680" cy="461176"/>
           </a:xfrm>
           <a:prstGeom prst="rect">
             <a:avLst/>
@@ -3115,8 +3115,8 @@
         </p:nvSpPr>
         <p:spPr>
           <a:xfrm>
-            <a:off x="6675120" y="2679192"/>
-            <a:ext cx="2011680" cy="365760"/>
+            <a:off x="6675120" y="2908190"/>
+            <a:ext cx="2011680" cy="461176"/>
           </a:xfrm>
           <a:prstGeom prst="rect">
             <a:avLst/>
@@ -3154,12 +3154,12 @@
         </p:nvSpPr>
         <p:spPr>
           <a:xfrm>
-            <a:off x="457200" y="3118104"/>
-            <a:ext cx="8229600" cy="365760"/>
+            <a:off x="457200" y="3461601"/>
+            <a:ext cx="8229600" cy="461176"/>
           </a:xfrm>
           <a:prstGeom prst="roundRect">
             <a:avLst>
-              <a:gd name="adj" fmla="val 11538"/>
+              <a:gd name="adj" fmla="val 9151"/>
             </a:avLst>
           </a:prstGeom>
           <a:solidFill>
@@ -3181,8 +3181,8 @@
         </p:nvSpPr>
         <p:spPr>
           <a:xfrm>
-            <a:off x="640080" y="3118104"/>
-            <a:ext cx="4023360" cy="365760"/>
+            <a:off x="640080" y="3461601"/>
+            <a:ext cx="4023360" cy="461176"/>
           </a:xfrm>
           <a:prstGeom prst="rect">
             <a:avLst/>
@@ -3220,8 +3220,8 @@
         </p:nvSpPr>
         <p:spPr>
           <a:xfrm>
-            <a:off x="4663440" y="3118104"/>
-            <a:ext cx="2011680" cy="365760"/>
+            <a:off x="4663440" y="3461601"/>
+            <a:ext cx="2011680" cy="461176"/>
           </a:xfrm>
           <a:prstGeom prst="rect">
             <a:avLst/>
@@ -3259,8 +3259,8 @@
         </p:nvSpPr>
         <p:spPr>
           <a:xfrm>
-            <a:off x="6675120" y="3118104"/>
-            <a:ext cx="2011680" cy="365760"/>
+            <a:off x="6675120" y="3461601"/>
+            <a:ext cx="2011680" cy="461176"/>
           </a:xfrm>
           <a:prstGeom prst="rect">
             <a:avLst/>
@@ -3350,7 +3350,7 @@
                 <a:ea typeface="Inter" pitchFamily="34" charset="-122"/>
                 <a:cs typeface="Inter" pitchFamily="34" charset="-120"/>
               </a:rPr>
-              <a:t>Best stretch 28 days, not 30; four full weeks off, Sunday to Saturday, costs 15 days’ leave, not 14. Average the same, worst a day better.</a:t>
+              <a:t>Best stretch 28 days, not 30; four full weeks off in a row, Sunday to Saturday, costs 15 days’ leave, not 14. Average the same, worst a day better.</a:t>
             </a:r>
             <a:endParaRPr lang="en-US" sz="1400" dirty="0"/>
           </a:p>
@@ -3592,11 +3592,11 @@
         <p:spPr>
           <a:xfrm>
             <a:off x="457200" y="1801368"/>
-            <a:ext cx="8229600" cy="365760"/>
+            <a:ext cx="8229600" cy="461176"/>
           </a:xfrm>
           <a:prstGeom prst="roundRect">
             <a:avLst>
-              <a:gd name="adj" fmla="val 11538"/>
+              <a:gd name="adj" fmla="val 9151"/>
             </a:avLst>
           </a:prstGeom>
           <a:solidFill>
@@ -3619,7 +3619,7 @@
         <p:spPr>
           <a:xfrm>
             <a:off x="640080" y="1801368"/>
-            <a:ext cx="4023360" cy="365760"/>
+            <a:ext cx="4023360" cy="461176"/>
           </a:xfrm>
           <a:prstGeom prst="rect">
             <a:avLst/>
@@ -3658,7 +3658,7 @@
         <p:spPr>
           <a:xfrm>
             <a:off x="4663440" y="1801368"/>
-            <a:ext cx="2011680" cy="365760"/>
+            <a:ext cx="2011680" cy="461176"/>
           </a:xfrm>
           <a:prstGeom prst="rect">
             <a:avLst/>
@@ -3697,7 +3697,7 @@
         <p:spPr>
           <a:xfrm>
             <a:off x="6675120" y="1801368"/>
-            <a:ext cx="2011680" cy="365760"/>
+            <a:ext cx="2011680" cy="461176"/>
           </a:xfrm>
           <a:prstGeom prst="rect">
             <a:avLst/>
@@ -3735,12 +3735,12 @@
         </p:nvSpPr>
         <p:spPr>
           <a:xfrm>
-            <a:off x="457200" y="2240280"/>
-            <a:ext cx="8229600" cy="365760"/>
+            <a:off x="457200" y="2354779"/>
+            <a:ext cx="8229600" cy="461176"/>
           </a:xfrm>
           <a:prstGeom prst="roundRect">
             <a:avLst>
-              <a:gd name="adj" fmla="val 11538"/>
+              <a:gd name="adj" fmla="val 9151"/>
             </a:avLst>
           </a:prstGeom>
           <a:solidFill>
@@ -3762,8 +3762,8 @@
         </p:nvSpPr>
         <p:spPr>
           <a:xfrm>
-            <a:off x="640080" y="2240280"/>
-            <a:ext cx="4023360" cy="365760"/>
+            <a:off x="640080" y="2354779"/>
+            <a:ext cx="4023360" cy="461176"/>
           </a:xfrm>
           <a:prstGeom prst="rect">
             <a:avLst/>
@@ -3801,8 +3801,8 @@
         </p:nvSpPr>
         <p:spPr>
           <a:xfrm>
-            <a:off x="4663440" y="2240280"/>
-            <a:ext cx="2011680" cy="365760"/>
+            <a:off x="4663440" y="2354779"/>
+            <a:ext cx="2011680" cy="461176"/>
           </a:xfrm>
           <a:prstGeom prst="rect">
             <a:avLst/>
@@ -3840,8 +3840,8 @@
         </p:nvSpPr>
         <p:spPr>
           <a:xfrm>
-            <a:off x="6675120" y="2240280"/>
-            <a:ext cx="2011680" cy="365760"/>
+            <a:off x="6675120" y="2354779"/>
+            <a:ext cx="2011680" cy="461176"/>
           </a:xfrm>
           <a:prstGeom prst="rect">
             <a:avLst/>
@@ -3879,12 +3879,12 @@
         </p:nvSpPr>
         <p:spPr>
           <a:xfrm>
-            <a:off x="457200" y="2679192"/>
-            <a:ext cx="8229600" cy="365760"/>
+            <a:off x="457200" y="2908190"/>
+            <a:ext cx="8229600" cy="461176"/>
           </a:xfrm>
           <a:prstGeom prst="roundRect">
             <a:avLst>
-              <a:gd name="adj" fmla="val 11538"/>
+              <a:gd name="adj" fmla="val 9151"/>
             </a:avLst>
           </a:prstGeom>
           <a:solidFill>
@@ -3906,8 +3906,8 @@
         </p:nvSpPr>
         <p:spPr>
           <a:xfrm>
-            <a:off x="640080" y="2679192"/>
-            <a:ext cx="4023360" cy="365760"/>
+            <a:off x="640080" y="2908190"/>
+            <a:ext cx="4023360" cy="461176"/>
           </a:xfrm>
           <a:prstGeom prst="rect">
             <a:avLst/>
@@ -3945,8 +3945,8 @@
         </p:nvSpPr>
         <p:spPr>
           <a:xfrm>
-            <a:off x="4663440" y="2679192"/>
-            <a:ext cx="2011680" cy="365760"/>
+            <a:off x="4663440" y="2908190"/>
+            <a:ext cx="2011680" cy="461176"/>
           </a:xfrm>
           <a:prstGeom prst="rect">
             <a:avLst/>
@@ -3984,8 +3984,8 @@
         </p:nvSpPr>
         <p:spPr>
           <a:xfrm>
-            <a:off x="6675120" y="2679192"/>
-            <a:ext cx="2011680" cy="365760"/>
+            <a:off x="6675120" y="2908190"/>
+            <a:ext cx="2011680" cy="461176"/>
           </a:xfrm>
           <a:prstGeom prst="rect">
             <a:avLst/>
@@ -4023,12 +4023,12 @@
         </p:nvSpPr>
         <p:spPr>
           <a:xfrm>
-            <a:off x="457200" y="3118104"/>
-            <a:ext cx="8229600" cy="365760"/>
+            <a:off x="457200" y="3461601"/>
+            <a:ext cx="8229600" cy="461176"/>
           </a:xfrm>
           <a:prstGeom prst="roundRect">
             <a:avLst>
-              <a:gd name="adj" fmla="val 11538"/>
+              <a:gd name="adj" fmla="val 9151"/>
             </a:avLst>
           </a:prstGeom>
           <a:solidFill>
@@ -4050,8 +4050,8 @@
         </p:nvSpPr>
         <p:spPr>
           <a:xfrm>
-            <a:off x="640080" y="3118104"/>
-            <a:ext cx="4023360" cy="365760"/>
+            <a:off x="640080" y="3461601"/>
+            <a:ext cx="4023360" cy="461176"/>
           </a:xfrm>
           <a:prstGeom prst="rect">
             <a:avLst/>
@@ -4089,8 +4089,8 @@
         </p:nvSpPr>
         <p:spPr>
           <a:xfrm>
-            <a:off x="4663440" y="3118104"/>
-            <a:ext cx="2011680" cy="365760"/>
+            <a:off x="4663440" y="3461601"/>
+            <a:ext cx="2011680" cy="461176"/>
           </a:xfrm>
           <a:prstGeom prst="rect">
             <a:avLst/>
@@ -4128,8 +4128,8 @@
         </p:nvSpPr>
         <p:spPr>
           <a:xfrm>
-            <a:off x="6675120" y="3118104"/>
-            <a:ext cx="2011680" cy="365760"/>
+            <a:off x="6675120" y="3461601"/>
+            <a:ext cx="2011680" cy="461176"/>
           </a:xfrm>
           <a:prstGeom prst="rect">
             <a:avLst/>
@@ -4473,7 +4473,7 @@
                 <a:ea typeface="Inter" pitchFamily="34" charset="-122"/>
                 <a:cs typeface="Inter" pitchFamily="34" charset="-120"/>
               </a:rPr>
-              <a:t>Three are shorter versions of today’s lates; two are longer weekday earlies.</a:t>
+              <a:t>Three shorter lates, two longer weekday earlies and the 9-hour Sunday early.</a:t>
             </a:r>
             <a:endParaRPr lang="en-US" sz="1250" dirty="0"/>
           </a:p>
@@ -4539,7 +4539,7 @@
                 <a:ea typeface="Inter" pitchFamily="34" charset="-122"/>
                 <a:cs typeface="Inter" pitchFamily="34" charset="-120"/>
               </a:rPr>
-              <a:t>Shifts about 2 minutes longer on average</a:t>
+              <a:t>Earlies or lates in longer runs</a:t>
             </a:r>
             <a:endParaRPr lang="en-US" sz="1400" dirty="0"/>
           </a:p>
@@ -4578,7 +4578,7 @@
                 <a:ea typeface="Inter" pitchFamily="34" charset="-122"/>
                 <a:cs typeface="Inter" pitchFamily="34" charset="-120"/>
               </a:rPr>
-              <a:t>That is what keeps days at work to 219 a year or fewer on the same 35 hours.</a:t>
+              <a:t>Up to 5 weeks of one kind, 7 if the cover weeks go the same way (today 2, up to 3).</a:t>
             </a:r>
             <a:endParaRPr lang="en-US" sz="1250" dirty="0"/>
           </a:p>
@@ -4683,7 +4683,7 @@
                 <a:ea typeface="Inter" pitchFamily="34" charset="-122"/>
                 <a:cs typeface="Inter" pitchFamily="34" charset="-120"/>
               </a:rPr>
-              <a:t>The least leave for four complete weeks off, Sunday to Saturday.</a:t>
+              <a:t>The least leave for four complete weeks off in a row, Sunday to Saturday.</a:t>
             </a:r>
             <a:endParaRPr lang="en-US" sz="1250" dirty="0"/>
           </a:p>
@@ -4854,7 +4854,7 @@
                 <a:ea typeface="Inter" pitchFamily="34" charset="-122"/>
                 <a:cs typeface="Inter" pitchFamily="34" charset="-120"/>
               </a:rPr>
-              <a:t>A few more late finishes</a:t>
+              <a:t>More late finishes</a:t>
             </a:r>
             <a:endParaRPr lang="en-US" sz="1400" dirty="0"/>
           </a:p>
@@ -4893,7 +4893,7 @@
                 <a:ea typeface="Inter" pitchFamily="34" charset="-122"/>
                 <a:cs typeface="Inter" pitchFamily="34" charset="-120"/>
               </a:rPr>
-              <a:t>42 a year each at 23:00 or later (today 39) — the rules’ minimum.</a:t>
+              <a:t>42 a year each at 23:00 or later (today 39), and 94 at 22:00 or later (today 78).</a:t>
             </a:r>
             <a:endParaRPr lang="en-US" sz="1250" dirty="0"/>
           </a:p>
@@ -4959,7 +4959,7 @@
                 <a:ea typeface="Inter" pitchFamily="34" charset="-122"/>
                 <a:cs typeface="Inter" pitchFamily="34" charset="-120"/>
               </a:rPr>
-              <a:t>Still a proposal</a:t>
+              <a:t>Fewer early finishes</a:t>
             </a:r>
             <a:endParaRPr lang="en-US" sz="1400" dirty="0"/>
           </a:p>
@@ -4998,7 +4998,7 @@
                 <a:ea typeface="Inter" pitchFamily="34" charset="-122"/>
                 <a:cs typeface="Inter" pitchFamily="34" charset="-120"/>
               </a:rPr>
-              <a:t>Your views count before a link is chosen, and who goes on which line is not decided.</a:t>
+              <a:t>12 a year each finish before 14:00 (today 26).</a:t>
             </a:r>
             <a:endParaRPr lang="en-US" sz="1250" dirty="0"/>
           </a:p>
@@ -5063,7 +5063,7 @@
                 <a:ea typeface="Inter" pitchFamily="34" charset="-122"/>
                 <a:cs typeface="Inter" pitchFamily="34" charset="-120"/>
               </a:rPr>
-              <a:t>None of these is hidden: each one is on the full proposal sheet too.</a:t>
+              <a:t>None of these is hidden: every figure here is worked out from the rota.</a:t>
             </a:r>
           </a:p>
         </p:txBody>
@@ -7453,7 +7453,7 @@
                 <a:ea typeface="Inter" pitchFamily="34" charset="-122"/>
                 <a:cs typeface="Inter" pitchFamily="34" charset="-120"/>
               </a:rPr>
-              <a:t>In Step · IS-26-T4 · every figure worked out from the rota by the Marylebone Roster app</a:t>
+              <a:t>In Step · IS-26-T4 · every figure worked out from the rota by the Marylebone Roster app and its tooling</a:t>
             </a:r>
             <a:endParaRPr lang="en-US" sz="1200" dirty="0"/>
           </a:p>
@@ -7879,7 +7879,7 @@
                 <a:ea typeface="Inter" pitchFamily="34" charset="-122"/>
                 <a:cs typeface="Inter" pitchFamily="34" charset="-120"/>
               </a:rPr>
-              <a:t>up to 7 · today 7</a:t>
+              <a:t>up to 7 · today 7–9</a:t>
             </a:r>
             <a:endParaRPr lang="en-US" sz="1200" dirty="0"/>
           </a:p>
@@ -9382,11 +9382,11 @@
         <p:spPr>
           <a:xfrm>
             <a:off x="457200" y="1801368"/>
-            <a:ext cx="8229600" cy="365760"/>
+            <a:ext cx="8229600" cy="623944"/>
           </a:xfrm>
           <a:prstGeom prst="roundRect">
             <a:avLst>
-              <a:gd name="adj" fmla="val 11538"/>
+              <a:gd name="adj" fmla="val 6764"/>
             </a:avLst>
           </a:prstGeom>
           <a:solidFill>
@@ -9409,7 +9409,7 @@
         <p:spPr>
           <a:xfrm>
             <a:off x="640080" y="1801368"/>
-            <a:ext cx="4023360" cy="365760"/>
+            <a:ext cx="4023360" cy="623944"/>
           </a:xfrm>
           <a:prstGeom prst="rect">
             <a:avLst/>
@@ -9425,7 +9425,7 @@
               <a:buNone/>
             </a:pPr>
             <a:r>
-              <a:rPr lang="en-US" sz="1400" dirty="0">
+              <a:rPr lang="en-US" sz="1600" dirty="0">
                 <a:solidFill>
                   <a:srgbClr val="1B2533"/>
                 </a:solidFill>
@@ -9435,7 +9435,7 @@
               </a:rPr>
               <a:t>Contracted hours a week</a:t>
             </a:r>
-            <a:endParaRPr lang="en-US" sz="1400" dirty="0"/>
+            <a:endParaRPr lang="en-US" sz="1600" dirty="0"/>
           </a:p>
         </p:txBody>
       </p:sp>
@@ -9448,7 +9448,7 @@
         <p:spPr>
           <a:xfrm>
             <a:off x="4663440" y="1801368"/>
-            <a:ext cx="2011680" cy="365760"/>
+            <a:ext cx="2011680" cy="623944"/>
           </a:xfrm>
           <a:prstGeom prst="rect">
             <a:avLst/>
@@ -9464,7 +9464,7 @@
               <a:buNone/>
             </a:pPr>
             <a:r>
-              <a:rPr lang="en-US" sz="1600" dirty="0">
+              <a:rPr lang="en-US" sz="1800" dirty="0">
                 <a:solidFill>
                   <a:srgbClr val="5B6778"/>
                 </a:solidFill>
@@ -9474,7 +9474,7 @@
               </a:rPr>
               <a:t>35h</a:t>
             </a:r>
-            <a:endParaRPr lang="en-US" sz="1600" dirty="0"/>
+            <a:endParaRPr lang="en-US" sz="1800" dirty="0"/>
           </a:p>
         </p:txBody>
       </p:sp>
@@ -9487,7 +9487,7 @@
         <p:spPr>
           <a:xfrm>
             <a:off x="6675120" y="1801368"/>
-            <a:ext cx="2011680" cy="365760"/>
+            <a:ext cx="2011680" cy="623944"/>
           </a:xfrm>
           <a:prstGeom prst="rect">
             <a:avLst/>
@@ -9503,7 +9503,7 @@
               <a:buNone/>
             </a:pPr>
             <a:r>
-              <a:rPr lang="en-US" sz="1800" b="1" dirty="0">
+              <a:rPr lang="en-US" sz="2000" b="1" dirty="0">
                 <a:solidFill>
                   <a:srgbClr val="001E3C"/>
                 </a:solidFill>
@@ -9513,7 +9513,7 @@
               </a:rPr>
               <a:t>35h</a:t>
             </a:r>
-            <a:endParaRPr lang="en-US" sz="1800" dirty="0"/>
+            <a:endParaRPr lang="en-US" sz="2000" dirty="0"/>
           </a:p>
         </p:txBody>
       </p:sp>
@@ -9525,12 +9525,12 @@
         </p:nvSpPr>
         <p:spPr>
           <a:xfrm>
-            <a:off x="457200" y="2240280"/>
-            <a:ext cx="8229600" cy="365760"/>
+            <a:off x="457200" y="2550101"/>
+            <a:ext cx="8229600" cy="623944"/>
           </a:xfrm>
           <a:prstGeom prst="roundRect">
             <a:avLst>
-              <a:gd name="adj" fmla="val 11538"/>
+              <a:gd name="adj" fmla="val 6764"/>
             </a:avLst>
           </a:prstGeom>
           <a:solidFill>
@@ -9552,8 +9552,8 @@
         </p:nvSpPr>
         <p:spPr>
           <a:xfrm>
-            <a:off x="640080" y="2240280"/>
-            <a:ext cx="4023360" cy="365760"/>
+            <a:off x="640080" y="2550101"/>
+            <a:ext cx="4023360" cy="623944"/>
           </a:xfrm>
           <a:prstGeom prst="rect">
             <a:avLst/>
@@ -9569,7 +9569,7 @@
               <a:buNone/>
             </a:pPr>
             <a:r>
-              <a:rPr lang="en-US" sz="1400" dirty="0">
+              <a:rPr lang="en-US" sz="1600" dirty="0">
                 <a:solidFill>
                   <a:srgbClr val="1B2533"/>
                 </a:solidFill>
@@ -9579,7 +9579,7 @@
               </a:rPr>
               <a:t>Contracted days at work a week</a:t>
             </a:r>
-            <a:endParaRPr lang="en-US" sz="1400" dirty="0"/>
+            <a:endParaRPr lang="en-US" sz="1600" dirty="0"/>
           </a:p>
         </p:txBody>
       </p:sp>
@@ -9591,8 +9591,8 @@
         </p:nvSpPr>
         <p:spPr>
           <a:xfrm>
-            <a:off x="4663440" y="2240280"/>
-            <a:ext cx="2011680" cy="365760"/>
+            <a:off x="4663440" y="2550101"/>
+            <a:ext cx="2011680" cy="623944"/>
           </a:xfrm>
           <a:prstGeom prst="rect">
             <a:avLst/>
@@ -9608,7 +9608,7 @@
               <a:buNone/>
             </a:pPr>
             <a:r>
-              <a:rPr lang="en-US" sz="1600" dirty="0">
+              <a:rPr lang="en-US" sz="1800" dirty="0">
                 <a:solidFill>
                   <a:srgbClr val="5B6778"/>
                 </a:solidFill>
@@ -9618,7 +9618,7 @@
               </a:rPr>
               <a:t>4.20</a:t>
             </a:r>
-            <a:endParaRPr lang="en-US" sz="1600" dirty="0"/>
+            <a:endParaRPr lang="en-US" sz="1800" dirty="0"/>
           </a:p>
         </p:txBody>
       </p:sp>
@@ -9630,8 +9630,8 @@
         </p:nvSpPr>
         <p:spPr>
           <a:xfrm>
-            <a:off x="6675120" y="2240280"/>
-            <a:ext cx="2011680" cy="365760"/>
+            <a:off x="6675120" y="2550101"/>
+            <a:ext cx="2011680" cy="623944"/>
           </a:xfrm>
           <a:prstGeom prst="rect">
             <a:avLst/>
@@ -9647,7 +9647,7 @@
               <a:buNone/>
             </a:pPr>
             <a:r>
-              <a:rPr lang="en-US" sz="1800" b="1" dirty="0">
+              <a:rPr lang="en-US" sz="2000" b="1" dirty="0">
                 <a:solidFill>
                   <a:srgbClr val="001E3C"/>
                 </a:solidFill>
@@ -9657,7 +9657,7 @@
               </a:rPr>
               <a:t>4.19</a:t>
             </a:r>
-            <a:endParaRPr lang="en-US" sz="1800" dirty="0"/>
+            <a:endParaRPr lang="en-US" sz="2000" dirty="0"/>
           </a:p>
         </p:txBody>
       </p:sp>
@@ -9669,12 +9669,12 @@
         </p:nvSpPr>
         <p:spPr>
           <a:xfrm>
-            <a:off x="457200" y="2679192"/>
-            <a:ext cx="8229600" cy="365760"/>
+            <a:off x="457200" y="3298834"/>
+            <a:ext cx="8229600" cy="623944"/>
           </a:xfrm>
           <a:prstGeom prst="roundRect">
             <a:avLst>
-              <a:gd name="adj" fmla="val 11538"/>
+              <a:gd name="adj" fmla="val 6764"/>
             </a:avLst>
           </a:prstGeom>
           <a:solidFill>
@@ -9696,8 +9696,8 @@
         </p:nvSpPr>
         <p:spPr>
           <a:xfrm>
-            <a:off x="640080" y="2679192"/>
-            <a:ext cx="4023360" cy="365760"/>
+            <a:off x="640080" y="3298834"/>
+            <a:ext cx="4023360" cy="623944"/>
           </a:xfrm>
           <a:prstGeom prst="rect">
             <a:avLst/>
@@ -9713,7 +9713,7 @@
               <a:buNone/>
             </a:pPr>
             <a:r>
-              <a:rPr lang="en-US" sz="1400" dirty="0">
+              <a:rPr lang="en-US" sz="1600" dirty="0">
                 <a:solidFill>
                   <a:srgbClr val="1B2533"/>
                 </a:solidFill>
@@ -9723,7 +9723,7 @@
               </a:rPr>
               <a:t>Contracted days at work a year</a:t>
             </a:r>
-            <a:endParaRPr lang="en-US" sz="1400" dirty="0"/>
+            <a:endParaRPr lang="en-US" sz="1600" dirty="0"/>
           </a:p>
         </p:txBody>
       </p:sp>
@@ -9735,8 +9735,8 @@
         </p:nvSpPr>
         <p:spPr>
           <a:xfrm>
-            <a:off x="4663440" y="2679192"/>
-            <a:ext cx="2011680" cy="365760"/>
+            <a:off x="4663440" y="3298834"/>
+            <a:ext cx="2011680" cy="623944"/>
           </a:xfrm>
           <a:prstGeom prst="rect">
             <a:avLst/>
@@ -9752,7 +9752,7 @@
               <a:buNone/>
             </a:pPr>
             <a:r>
-              <a:rPr lang="en-US" sz="1600" dirty="0">
+              <a:rPr lang="en-US" sz="1800" dirty="0">
                 <a:solidFill>
                   <a:srgbClr val="5B6778"/>
                 </a:solidFill>
@@ -9762,7 +9762,7 @@
               </a:rPr>
               <a:t>219.0</a:t>
             </a:r>
-            <a:endParaRPr lang="en-US" sz="1600" dirty="0"/>
+            <a:endParaRPr lang="en-US" sz="1800" dirty="0"/>
           </a:p>
         </p:txBody>
       </p:sp>
@@ -9774,8 +9774,8 @@
         </p:nvSpPr>
         <p:spPr>
           <a:xfrm>
-            <a:off x="6675120" y="2679192"/>
-            <a:ext cx="2011680" cy="365760"/>
+            <a:off x="6675120" y="3298834"/>
+            <a:ext cx="2011680" cy="623944"/>
           </a:xfrm>
           <a:prstGeom prst="rect">
             <a:avLst/>
@@ -9791,7 +9791,7 @@
               <a:buNone/>
             </a:pPr>
             <a:r>
-              <a:rPr lang="en-US" sz="1800" b="1" dirty="0">
+              <a:rPr lang="en-US" sz="2000" b="1" dirty="0">
                 <a:solidFill>
                   <a:srgbClr val="001E3C"/>
                 </a:solidFill>
@@ -9801,7 +9801,7 @@
               </a:rPr>
               <a:t>218.6</a:t>
             </a:r>
-            <a:endParaRPr lang="en-US" sz="1800" dirty="0"/>
+            <a:endParaRPr lang="en-US" sz="2000" dirty="0"/>
           </a:p>
         </p:txBody>
       </p:sp>
@@ -9865,7 +9865,7 @@
                 <a:ea typeface="Inter" pitchFamily="34" charset="-122"/>
                 <a:cs typeface="Inter" pitchFamily="34" charset="-120"/>
               </a:rPr>
-              <a:t>No. The same 35-hour week on average and no more days; weeks run from 25h 30m to 41h 05m (today 25h 10m to 43h 50m), and two more of the days fall on a Saturday.</a:t>
+              <a:t>No. The same 35-hour week on average; weeks run 25h 30m–41h 05m Monday to Saturday (today 25h 10m–43h 50m), and two more days a year are Saturdays.</a:t>
             </a:r>
             <a:endParaRPr lang="en-US" sz="1400" dirty="0"/>
           </a:p>
@@ -10107,11 +10107,11 @@
         <p:spPr>
           <a:xfrm>
             <a:off x="457200" y="1801368"/>
-            <a:ext cx="8229600" cy="365760"/>
+            <a:ext cx="8229600" cy="623944"/>
           </a:xfrm>
           <a:prstGeom prst="roundRect">
             <a:avLst>
-              <a:gd name="adj" fmla="val 11538"/>
+              <a:gd name="adj" fmla="val 6764"/>
             </a:avLst>
           </a:prstGeom>
           <a:solidFill>
@@ -10134,7 +10134,7 @@
         <p:spPr>
           <a:xfrm>
             <a:off x="640080" y="1801368"/>
-            <a:ext cx="4023360" cy="365760"/>
+            <a:ext cx="4023360" cy="623944"/>
           </a:xfrm>
           <a:prstGeom prst="rect">
             <a:avLst/>
@@ -10150,7 +10150,7 @@
               <a:buNone/>
             </a:pPr>
             <a:r>
-              <a:rPr lang="en-US" sz="1400" dirty="0">
+              <a:rPr lang="en-US" sz="1600" dirty="0">
                 <a:solidFill>
                   <a:srgbClr val="1B2533"/>
                 </a:solidFill>
@@ -10160,7 +10160,7 @@
               </a:rPr>
               <a:t>Contracted hours a week</a:t>
             </a:r>
-            <a:endParaRPr lang="en-US" sz="1400" dirty="0"/>
+            <a:endParaRPr lang="en-US" sz="1600" dirty="0"/>
           </a:p>
         </p:txBody>
       </p:sp>
@@ -10173,7 +10173,7 @@
         <p:spPr>
           <a:xfrm>
             <a:off x="4663440" y="1801368"/>
-            <a:ext cx="2011680" cy="365760"/>
+            <a:ext cx="2011680" cy="623944"/>
           </a:xfrm>
           <a:prstGeom prst="rect">
             <a:avLst/>
@@ -10189,7 +10189,7 @@
               <a:buNone/>
             </a:pPr>
             <a:r>
-              <a:rPr lang="en-US" sz="1600" dirty="0">
+              <a:rPr lang="en-US" sz="1800" dirty="0">
                 <a:solidFill>
                   <a:srgbClr val="5B6778"/>
                 </a:solidFill>
@@ -10199,7 +10199,7 @@
               </a:rPr>
               <a:t>35h</a:t>
             </a:r>
-            <a:endParaRPr lang="en-US" sz="1600" dirty="0"/>
+            <a:endParaRPr lang="en-US" sz="1800" dirty="0"/>
           </a:p>
         </p:txBody>
       </p:sp>
@@ -10212,7 +10212,7 @@
         <p:spPr>
           <a:xfrm>
             <a:off x="6675120" y="1801368"/>
-            <a:ext cx="2011680" cy="365760"/>
+            <a:ext cx="2011680" cy="623944"/>
           </a:xfrm>
           <a:prstGeom prst="rect">
             <a:avLst/>
@@ -10228,7 +10228,7 @@
               <a:buNone/>
             </a:pPr>
             <a:r>
-              <a:rPr lang="en-US" sz="1800" b="1" dirty="0">
+              <a:rPr lang="en-US" sz="2000" b="1" dirty="0">
                 <a:solidFill>
                   <a:srgbClr val="001E3C"/>
                 </a:solidFill>
@@ -10238,7 +10238,7 @@
               </a:rPr>
               <a:t>35h</a:t>
             </a:r>
-            <a:endParaRPr lang="en-US" sz="1800" dirty="0"/>
+            <a:endParaRPr lang="en-US" sz="2000" dirty="0"/>
           </a:p>
         </p:txBody>
       </p:sp>
@@ -10250,12 +10250,12 @@
         </p:nvSpPr>
         <p:spPr>
           <a:xfrm>
-            <a:off x="457200" y="2240280"/>
-            <a:ext cx="8229600" cy="365760"/>
+            <a:off x="457200" y="2550101"/>
+            <a:ext cx="8229600" cy="623944"/>
           </a:xfrm>
           <a:prstGeom prst="roundRect">
             <a:avLst>
-              <a:gd name="adj" fmla="val 11538"/>
+              <a:gd name="adj" fmla="val 6764"/>
             </a:avLst>
           </a:prstGeom>
           <a:solidFill>
@@ -10277,8 +10277,8 @@
         </p:nvSpPr>
         <p:spPr>
           <a:xfrm>
-            <a:off x="640080" y="2240280"/>
-            <a:ext cx="4023360" cy="365760"/>
+            <a:off x="640080" y="2550101"/>
+            <a:ext cx="4023360" cy="623944"/>
           </a:xfrm>
           <a:prstGeom prst="rect">
             <a:avLst/>
@@ -10294,7 +10294,7 @@
               <a:buNone/>
             </a:pPr>
             <a:r>
-              <a:rPr lang="en-US" sz="1400" dirty="0">
+              <a:rPr lang="en-US" sz="1600" dirty="0">
                 <a:solidFill>
                   <a:srgbClr val="1B2533"/>
                 </a:solidFill>
@@ -10304,7 +10304,7 @@
               </a:rPr>
               <a:t>Saturdays a year, at time and a quarter</a:t>
             </a:r>
-            <a:endParaRPr lang="en-US" sz="1400" dirty="0"/>
+            <a:endParaRPr lang="en-US" sz="1600" dirty="0"/>
           </a:p>
         </p:txBody>
       </p:sp>
@@ -10316,8 +10316,8 @@
         </p:nvSpPr>
         <p:spPr>
           <a:xfrm>
-            <a:off x="4663440" y="2240280"/>
-            <a:ext cx="2011680" cy="365760"/>
+            <a:off x="4663440" y="2550101"/>
+            <a:ext cx="2011680" cy="623944"/>
           </a:xfrm>
           <a:prstGeom prst="rect">
             <a:avLst/>
@@ -10333,7 +10333,7 @@
               <a:buNone/>
             </a:pPr>
             <a:r>
-              <a:rPr lang="en-US" sz="1600" dirty="0">
+              <a:rPr lang="en-US" sz="1800" dirty="0">
                 <a:solidFill>
                   <a:srgbClr val="5B6778"/>
                 </a:solidFill>
@@ -10343,7 +10343,7 @@
               </a:rPr>
               <a:t>26</a:t>
             </a:r>
-            <a:endParaRPr lang="en-US" sz="1600" dirty="0"/>
+            <a:endParaRPr lang="en-US" sz="1800" dirty="0"/>
           </a:p>
         </p:txBody>
       </p:sp>
@@ -10355,8 +10355,8 @@
         </p:nvSpPr>
         <p:spPr>
           <a:xfrm>
-            <a:off x="6675120" y="2240280"/>
-            <a:ext cx="2011680" cy="365760"/>
+            <a:off x="6675120" y="2550101"/>
+            <a:ext cx="2011680" cy="623944"/>
           </a:xfrm>
           <a:prstGeom prst="rect">
             <a:avLst/>
@@ -10372,7 +10372,7 @@
               <a:buNone/>
             </a:pPr>
             <a:r>
-              <a:rPr lang="en-US" sz="1800" b="1" dirty="0">
+              <a:rPr lang="en-US" sz="2000" b="1" dirty="0">
                 <a:solidFill>
                   <a:srgbClr val="001E3C"/>
                 </a:solidFill>
@@ -10382,7 +10382,7 @@
               </a:rPr>
               <a:t>28</a:t>
             </a:r>
-            <a:endParaRPr lang="en-US" sz="1800" dirty="0"/>
+            <a:endParaRPr lang="en-US" sz="2000" dirty="0"/>
           </a:p>
         </p:txBody>
       </p:sp>
@@ -10394,12 +10394,12 @@
         </p:nvSpPr>
         <p:spPr>
           <a:xfrm>
-            <a:off x="457200" y="2679192"/>
-            <a:ext cx="8229600" cy="365760"/>
+            <a:off x="457200" y="3298834"/>
+            <a:ext cx="8229600" cy="623944"/>
           </a:xfrm>
           <a:prstGeom prst="roundRect">
             <a:avLst>
-              <a:gd name="adj" fmla="val 11538"/>
+              <a:gd name="adj" fmla="val 6764"/>
             </a:avLst>
           </a:prstGeom>
           <a:solidFill>
@@ -10421,8 +10421,8 @@
         </p:nvSpPr>
         <p:spPr>
           <a:xfrm>
-            <a:off x="640080" y="2679192"/>
-            <a:ext cx="4023360" cy="365760"/>
+            <a:off x="640080" y="3298834"/>
+            <a:ext cx="4023360" cy="623944"/>
           </a:xfrm>
           <a:prstGeom prst="rect">
             <a:avLst/>
@@ -10438,7 +10438,7 @@
               <a:buNone/>
             </a:pPr>
             <a:r>
-              <a:rPr lang="en-US" sz="1400" dirty="0">
+              <a:rPr lang="en-US" sz="1600" dirty="0">
                 <a:solidFill>
                   <a:srgbClr val="1B2533"/>
                 </a:solidFill>
@@ -10448,7 +10448,7 @@
               </a:rPr>
               <a:t>Sunday overtime to share — each, a year</a:t>
             </a:r>
-            <a:endParaRPr lang="en-US" sz="1400" dirty="0"/>
+            <a:endParaRPr lang="en-US" sz="1600" dirty="0"/>
           </a:p>
         </p:txBody>
       </p:sp>
@@ -10460,8 +10460,8 @@
         </p:nvSpPr>
         <p:spPr>
           <a:xfrm>
-            <a:off x="4663440" y="2679192"/>
-            <a:ext cx="2011680" cy="365760"/>
+            <a:off x="4663440" y="3298834"/>
+            <a:ext cx="2011680" cy="623944"/>
           </a:xfrm>
           <a:prstGeom prst="rect">
             <a:avLst/>
@@ -10477,7 +10477,7 @@
               <a:buNone/>
             </a:pPr>
             <a:r>
-              <a:rPr lang="en-US" sz="1600" dirty="0">
+              <a:rPr lang="en-US" sz="1800" dirty="0">
                 <a:solidFill>
                   <a:srgbClr val="5B6778"/>
                 </a:solidFill>
@@ -10487,7 +10487,7 @@
               </a:rPr>
               <a:t>21</a:t>
             </a:r>
-            <a:endParaRPr lang="en-US" sz="1600" dirty="0"/>
+            <a:endParaRPr lang="en-US" sz="1800" dirty="0"/>
           </a:p>
         </p:txBody>
       </p:sp>
@@ -10499,8 +10499,8 @@
         </p:nvSpPr>
         <p:spPr>
           <a:xfrm>
-            <a:off x="6675120" y="2679192"/>
-            <a:ext cx="2011680" cy="365760"/>
+            <a:off x="6675120" y="3298834"/>
+            <a:ext cx="2011680" cy="623944"/>
           </a:xfrm>
           <a:prstGeom prst="rect">
             <a:avLst/>
@@ -10516,7 +10516,7 @@
               <a:buNone/>
             </a:pPr>
             <a:r>
-              <a:rPr lang="en-US" sz="1800" b="1" dirty="0">
+              <a:rPr lang="en-US" sz="2000" b="1" dirty="0">
                 <a:solidFill>
                   <a:srgbClr val="001E3C"/>
                 </a:solidFill>
@@ -10526,7 +10526,7 @@
               </a:rPr>
               <a:t>20</a:t>
             </a:r>
-            <a:endParaRPr lang="en-US" sz="1800" dirty="0"/>
+            <a:endParaRPr lang="en-US" sz="2000" dirty="0"/>
           </a:p>
         </p:txBody>
       </p:sp>
@@ -10590,7 +10590,7 @@
                 <a:ea typeface="Inter" pitchFamily="34" charset="-122"/>
                 <a:cs typeface="Inter" pitchFamily="34" charset="-120"/>
               </a:rPr>
-              <a:t>No. The same 35-hour week — plus about two more Saturdays at time and a quarter.</a:t>
+              <a:t>No: the same 35 hours. Two more Saturdays at time and a quarter, less Sunday overtime: about £250 a year less if you work your share of Sundays.</a:t>
             </a:r>
             <a:endParaRPr lang="en-US" sz="1400" dirty="0"/>
           </a:p>
@@ -11603,7 +11603,7 @@
                 <a:ea typeface="Inter" pitchFamily="34" charset="-122"/>
                 <a:cs typeface="Inter" pitchFamily="34" charset="-120"/>
               </a:rPr>
-              <a:t>Every closing shift is 30 to 60 minutes shorter; the longest early turn goes from 8h 30m to 9h 00m, and nothing runs over 9 hours.</a:t>
+              <a:t>Every closing shift is 30 to 60 minutes shorter; the longest early Monday to Saturday goes from 8h 30m to 8h 55m, and nothing runs over 9 hours.</a:t>
             </a:r>
             <a:endParaRPr lang="en-US" sz="1400" dirty="0"/>
           </a:p>
@@ -11752,7 +11752,7 @@
                 <a:ea typeface="Inter" pitchFamily="34" charset="-122"/>
                 <a:cs typeface="Inter" pitchFamily="34" charset="-120"/>
               </a:rPr>
-              <a:t>3 more a year after 23:00 (42, today 39); 16 more at 22:00 or later (94, today 78)</a:t>
+              <a:t>3 more a year at 23:00 or later (42, today 39); 16 more at 22:00 or later (94, today 78)</a:t>
             </a:r>
             <a:endParaRPr lang="en-US" sz="1500" dirty="0"/>
           </a:p>
@@ -11845,11 +11845,11 @@
         <p:spPr>
           <a:xfrm>
             <a:off x="457200" y="1801368"/>
-            <a:ext cx="8229600" cy="365760"/>
+            <a:ext cx="8229600" cy="461176"/>
           </a:xfrm>
           <a:prstGeom prst="roundRect">
             <a:avLst>
-              <a:gd name="adj" fmla="val 11538"/>
+              <a:gd name="adj" fmla="val 9151"/>
             </a:avLst>
           </a:prstGeom>
           <a:solidFill>
@@ -11872,7 +11872,7 @@
         <p:spPr>
           <a:xfrm>
             <a:off x="640080" y="1801368"/>
-            <a:ext cx="4023360" cy="365760"/>
+            <a:ext cx="4023360" cy="461176"/>
           </a:xfrm>
           <a:prstGeom prst="rect">
             <a:avLst/>
@@ -11911,7 +11911,7 @@
         <p:spPr>
           <a:xfrm>
             <a:off x="4663440" y="1801368"/>
-            <a:ext cx="2011680" cy="365760"/>
+            <a:ext cx="2011680" cy="461176"/>
           </a:xfrm>
           <a:prstGeom prst="rect">
             <a:avLst/>
@@ -11950,7 +11950,7 @@
         <p:spPr>
           <a:xfrm>
             <a:off x="6675120" y="1801368"/>
-            <a:ext cx="2011680" cy="365760"/>
+            <a:ext cx="2011680" cy="461176"/>
           </a:xfrm>
           <a:prstGeom prst="rect">
             <a:avLst/>
@@ -11988,12 +11988,12 @@
         </p:nvSpPr>
         <p:spPr>
           <a:xfrm>
-            <a:off x="457200" y="2240280"/>
-            <a:ext cx="8229600" cy="365760"/>
+            <a:off x="457200" y="2354779"/>
+            <a:ext cx="8229600" cy="461176"/>
           </a:xfrm>
           <a:prstGeom prst="roundRect">
             <a:avLst>
-              <a:gd name="adj" fmla="val 11538"/>
+              <a:gd name="adj" fmla="val 9151"/>
             </a:avLst>
           </a:prstGeom>
           <a:solidFill>
@@ -12015,8 +12015,8 @@
         </p:nvSpPr>
         <p:spPr>
           <a:xfrm>
-            <a:off x="640080" y="2240280"/>
-            <a:ext cx="4023360" cy="365760"/>
+            <a:off x="640080" y="2354779"/>
+            <a:ext cx="4023360" cy="461176"/>
           </a:xfrm>
           <a:prstGeom prst="rect">
             <a:avLst/>
@@ -12054,8 +12054,8 @@
         </p:nvSpPr>
         <p:spPr>
           <a:xfrm>
-            <a:off x="4663440" y="2240280"/>
-            <a:ext cx="2011680" cy="365760"/>
+            <a:off x="4663440" y="2354779"/>
+            <a:ext cx="2011680" cy="461176"/>
           </a:xfrm>
           <a:prstGeom prst="rect">
             <a:avLst/>
@@ -12093,8 +12093,8 @@
         </p:nvSpPr>
         <p:spPr>
           <a:xfrm>
-            <a:off x="6675120" y="2240280"/>
-            <a:ext cx="2011680" cy="365760"/>
+            <a:off x="6675120" y="2354779"/>
+            <a:ext cx="2011680" cy="461176"/>
           </a:xfrm>
           <a:prstGeom prst="rect">
             <a:avLst/>
@@ -12132,12 +12132,12 @@
         </p:nvSpPr>
         <p:spPr>
           <a:xfrm>
-            <a:off x="457200" y="2679192"/>
-            <a:ext cx="8229600" cy="365760"/>
+            <a:off x="457200" y="2908190"/>
+            <a:ext cx="8229600" cy="461176"/>
           </a:xfrm>
           <a:prstGeom prst="roundRect">
             <a:avLst>
-              <a:gd name="adj" fmla="val 11538"/>
+              <a:gd name="adj" fmla="val 9151"/>
             </a:avLst>
           </a:prstGeom>
           <a:solidFill>
@@ -12159,8 +12159,8 @@
         </p:nvSpPr>
         <p:spPr>
           <a:xfrm>
-            <a:off x="640080" y="2679192"/>
-            <a:ext cx="4023360" cy="365760"/>
+            <a:off x="640080" y="2908190"/>
+            <a:ext cx="4023360" cy="461176"/>
           </a:xfrm>
           <a:prstGeom prst="rect">
             <a:avLst/>
@@ -12198,8 +12198,8 @@
         </p:nvSpPr>
         <p:spPr>
           <a:xfrm>
-            <a:off x="4663440" y="2679192"/>
-            <a:ext cx="2011680" cy="365760"/>
+            <a:off x="4663440" y="2908190"/>
+            <a:ext cx="2011680" cy="461176"/>
           </a:xfrm>
           <a:prstGeom prst="rect">
             <a:avLst/>
@@ -12237,8 +12237,8 @@
         </p:nvSpPr>
         <p:spPr>
           <a:xfrm>
-            <a:off x="6675120" y="2679192"/>
-            <a:ext cx="2011680" cy="365760"/>
+            <a:off x="6675120" y="2908190"/>
+            <a:ext cx="2011680" cy="461176"/>
           </a:xfrm>
           <a:prstGeom prst="rect">
             <a:avLst/>
@@ -12276,12 +12276,12 @@
         </p:nvSpPr>
         <p:spPr>
           <a:xfrm>
-            <a:off x="457200" y="3118104"/>
-            <a:ext cx="8229600" cy="365760"/>
+            <a:off x="457200" y="3461601"/>
+            <a:ext cx="8229600" cy="461176"/>
           </a:xfrm>
           <a:prstGeom prst="roundRect">
             <a:avLst>
-              <a:gd name="adj" fmla="val 11538"/>
+              <a:gd name="adj" fmla="val 9151"/>
             </a:avLst>
           </a:prstGeom>
           <a:solidFill>
@@ -12303,8 +12303,8 @@
         </p:nvSpPr>
         <p:spPr>
           <a:xfrm>
-            <a:off x="640080" y="3118104"/>
-            <a:ext cx="4023360" cy="365760"/>
+            <a:off x="640080" y="3461601"/>
+            <a:ext cx="4023360" cy="461176"/>
           </a:xfrm>
           <a:prstGeom prst="rect">
             <a:avLst/>
@@ -12342,8 +12342,8 @@
         </p:nvSpPr>
         <p:spPr>
           <a:xfrm>
-            <a:off x="4663440" y="3118104"/>
-            <a:ext cx="2011680" cy="365760"/>
+            <a:off x="4663440" y="3461601"/>
+            <a:ext cx="2011680" cy="461176"/>
           </a:xfrm>
           <a:prstGeom prst="rect">
             <a:avLst/>
@@ -12381,8 +12381,8 @@
         </p:nvSpPr>
         <p:spPr>
           <a:xfrm>
-            <a:off x="6675120" y="3118104"/>
-            <a:ext cx="2011680" cy="365760"/>
+            <a:off x="6675120" y="3461601"/>
+            <a:ext cx="2011680" cy="461176"/>
           </a:xfrm>
           <a:prstGeom prst="rect">
             <a:avLst/>
@@ -12472,7 +12472,7 @@
                 <a:ea typeface="Inter" pitchFamily="34" charset="-122"/>
                 <a:cs typeface="Inter" pitchFamily="34" charset="-120"/>
               </a:rPr>
-              <a:t>More people stay on after 22:00 under the December staffing; the three more after 23:00 are the fewest the rules allow.</a:t>
+              <a:t>More people stay on after 22:00 under the December staffing; the three more at 23:00 or later are the fewest the rules allow.</a:t>
             </a:r>
             <a:endParaRPr lang="en-US" sz="1400" dirty="0"/>
           </a:p>
@@ -14248,7 +14248,7 @@
                 <a:ea typeface="Inter" pitchFamily="34" charset="-122"/>
                 <a:cs typeface="Inter" pitchFamily="34" charset="-120"/>
               </a:rPr>
-              <a:t>Weeks on one turn, no early–late switch</a:t>
+              <a:t>Weeks on one shift time, Monday to Friday</a:t>
             </a:r>
             <a:endParaRPr lang="en-US" sz="1400" dirty="0"/>
           </a:p>
